--- a/70_pf/steam/프레젠테이션1.pptx
+++ b/70_pf/steam/프레젠테이션1.pptx
@@ -5,9 +5,12 @@
     <p:sldMasterId id="2147483648" r:id="rId1"/>
   </p:sldMasterIdLst>
   <p:sldIdLst>
-    <p:sldId id="256" r:id="rId2"/>
-    <p:sldId id="257" r:id="rId3"/>
-    <p:sldId id="258" r:id="rId4"/>
+    <p:sldId id="261" r:id="rId2"/>
+    <p:sldId id="260" r:id="rId3"/>
+    <p:sldId id="259" r:id="rId4"/>
+    <p:sldId id="258" r:id="rId5"/>
+    <p:sldId id="256" r:id="rId6"/>
+    <p:sldId id="257" r:id="rId7"/>
   </p:sldIdLst>
   <p:sldSz cx="12192000" cy="6858000"/>
   <p:notesSz cx="6858000" cy="9144000"/>
@@ -3323,12 +3326,51 @@
           <a:chExt cx="0" cy="0"/>
         </a:xfrm>
       </p:grpSpPr>
+      <p:sp>
+        <p:nvSpPr>
+          <p:cNvPr id="4" name="TextBox 3">
+            <a:extLst>
+              <a:ext uri="{FF2B5EF4-FFF2-40B4-BE49-F238E27FC236}">
+                <a16:creationId xmlns:a16="http://schemas.microsoft.com/office/drawing/2014/main" id="{E51E32E6-FBB3-8DE5-F45F-AB34E2194445}"/>
+              </a:ext>
+            </a:extLst>
+          </p:cNvPr>
+          <p:cNvSpPr txBox="1"/>
+          <p:nvPr/>
+        </p:nvSpPr>
+        <p:spPr>
+          <a:xfrm>
+            <a:off x="609600" y="542925"/>
+            <a:ext cx="1479892" cy="369332"/>
+          </a:xfrm>
+          <a:prstGeom prst="rect">
+            <a:avLst/>
+          </a:prstGeom>
+          <a:noFill/>
+        </p:spPr>
+        <p:txBody>
+          <a:bodyPr wrap="none" rtlCol="0">
+            <a:spAutoFit/>
+          </a:bodyPr>
+          <a:lstStyle/>
+          <a:p>
+            <a:r>
+              <a:rPr lang="en-US" altLang="ko-KR" dirty="0"/>
+              <a:t>Main </a:t>
+            </a:r>
+            <a:r>
+              <a:rPr lang="ko-KR" altLang="en-US" dirty="0"/>
+              <a:t>페이지</a:t>
+            </a:r>
+          </a:p>
+        </p:txBody>
+      </p:sp>
       <p:pic>
         <p:nvPicPr>
-          <p:cNvPr id="5" name="그림 4">
-            <a:extLst>
-              <a:ext uri="{FF2B5EF4-FFF2-40B4-BE49-F238E27FC236}">
-                <a16:creationId xmlns:a16="http://schemas.microsoft.com/office/drawing/2014/main" id="{CE426FB0-43E5-63DE-97E0-039524D635A0}"/>
+          <p:cNvPr id="6" name="그림 5">
+            <a:extLst>
+              <a:ext uri="{FF2B5EF4-FFF2-40B4-BE49-F238E27FC236}">
+                <a16:creationId xmlns:a16="http://schemas.microsoft.com/office/drawing/2014/main" id="{2548A119-533A-5C7B-6E1B-1457E15C0310}"/>
               </a:ext>
             </a:extLst>
           </p:cNvPr>
@@ -3351,8 +3393,44 @@
         </p:blipFill>
         <p:spPr>
           <a:xfrm>
-            <a:off x="5372100" y="3171190"/>
-            <a:ext cx="6686550" cy="3566160"/>
+            <a:off x="0" y="3429000"/>
+            <a:ext cx="12192000" cy="2540000"/>
+          </a:xfrm>
+          <a:prstGeom prst="rect">
+            <a:avLst/>
+          </a:prstGeom>
+        </p:spPr>
+      </p:pic>
+      <p:pic>
+        <p:nvPicPr>
+          <p:cNvPr id="8" name="그림 7">
+            <a:extLst>
+              <a:ext uri="{FF2B5EF4-FFF2-40B4-BE49-F238E27FC236}">
+                <a16:creationId xmlns:a16="http://schemas.microsoft.com/office/drawing/2014/main" id="{15E6BD9A-C746-BA06-B882-4E6BE13F2503}"/>
+              </a:ext>
+            </a:extLst>
+          </p:cNvPr>
+          <p:cNvPicPr>
+            <a:picLocks noChangeAspect="1"/>
+          </p:cNvPicPr>
+          <p:nvPr/>
+        </p:nvPicPr>
+        <p:blipFill>
+          <a:blip r:embed="rId3">
+            <a:extLst>
+              <a:ext uri="{28A0092B-C50C-407E-A947-70E740481C1C}">
+                <a14:useLocalDpi xmlns:a14="http://schemas.microsoft.com/office/drawing/2010/main" val="0"/>
+              </a:ext>
+            </a:extLst>
+          </a:blip>
+          <a:stretch>
+            <a:fillRect/>
+          </a:stretch>
+        </p:blipFill>
+        <p:spPr>
+          <a:xfrm>
+            <a:off x="0" y="1491178"/>
+            <a:ext cx="12192000" cy="1270000"/>
           </a:xfrm>
           <a:prstGeom prst="rect">
             <a:avLst/>
@@ -3362,7 +3440,7 @@
     </p:spTree>
     <p:extLst>
       <p:ext uri="{BB962C8B-B14F-4D97-AF65-F5344CB8AC3E}">
-        <p14:creationId xmlns:p14="http://schemas.microsoft.com/office/powerpoint/2010/main" val="1558719325"/>
+        <p14:creationId xmlns:p14="http://schemas.microsoft.com/office/powerpoint/2010/main" val="1983105398"/>
       </p:ext>
     </p:extLst>
   </p:cSld>
@@ -3389,60 +3467,259 @@
           <a:chExt cx="0" cy="0"/>
         </a:xfrm>
       </p:grpSpPr>
-      <p:sp>
-        <p:nvSpPr>
-          <p:cNvPr id="2" name="제목 1">
-            <a:extLst>
-              <a:ext uri="{FF2B5EF4-FFF2-40B4-BE49-F238E27FC236}">
-                <a16:creationId xmlns:a16="http://schemas.microsoft.com/office/drawing/2014/main" id="{8F687BC2-0498-BAE6-157E-52746BE87979}"/>
-              </a:ext>
-            </a:extLst>
-          </p:cNvPr>
-          <p:cNvSpPr>
-            <a:spLocks noGrp="1"/>
-          </p:cNvSpPr>
-          <p:nvPr>
-            <p:ph type="title"/>
-          </p:nvPr>
-        </p:nvSpPr>
-        <p:spPr/>
-        <p:txBody>
-          <a:bodyPr/>
-          <a:lstStyle/>
-          <a:p>
+      <p:pic>
+        <p:nvPicPr>
+          <p:cNvPr id="5" name="그림 4">
+            <a:extLst>
+              <a:ext uri="{FF2B5EF4-FFF2-40B4-BE49-F238E27FC236}">
+                <a16:creationId xmlns:a16="http://schemas.microsoft.com/office/drawing/2014/main" id="{589D6F81-2A41-6ECA-C518-E0C6FACE6ECA}"/>
+              </a:ext>
+            </a:extLst>
+          </p:cNvPr>
+          <p:cNvPicPr>
+            <a:picLocks noChangeAspect="1"/>
+          </p:cNvPicPr>
+          <p:nvPr/>
+        </p:nvPicPr>
+        <p:blipFill>
+          <a:blip r:embed="rId2">
+            <a:extLst>
+              <a:ext uri="{28A0092B-C50C-407E-A947-70E740481C1C}">
+                <a14:useLocalDpi xmlns:a14="http://schemas.microsoft.com/office/drawing/2010/main" val="0"/>
+              </a:ext>
+            </a:extLst>
+          </a:blip>
+          <a:stretch>
+            <a:fillRect/>
+          </a:stretch>
+        </p:blipFill>
+        <p:spPr>
+          <a:xfrm>
+            <a:off x="4381501" y="257197"/>
+            <a:ext cx="3648074" cy="2978364"/>
+          </a:xfrm>
+          <a:prstGeom prst="rect">
+            <a:avLst/>
+          </a:prstGeom>
+        </p:spPr>
+      </p:pic>
+      <p:pic>
+        <p:nvPicPr>
+          <p:cNvPr id="7" name="그림 6">
+            <a:extLst>
+              <a:ext uri="{FF2B5EF4-FFF2-40B4-BE49-F238E27FC236}">
+                <a16:creationId xmlns:a16="http://schemas.microsoft.com/office/drawing/2014/main" id="{AFDD96F9-12DA-FCF1-9B96-B236D0B683F4}"/>
+              </a:ext>
+            </a:extLst>
+          </p:cNvPr>
+          <p:cNvPicPr>
+            <a:picLocks noChangeAspect="1"/>
+          </p:cNvPicPr>
+          <p:nvPr/>
+        </p:nvPicPr>
+        <p:blipFill>
+          <a:blip r:embed="rId3">
+            <a:extLst>
+              <a:ext uri="{28A0092B-C50C-407E-A947-70E740481C1C}">
+                <a14:useLocalDpi xmlns:a14="http://schemas.microsoft.com/office/drawing/2010/main" val="0"/>
+              </a:ext>
+            </a:extLst>
+          </a:blip>
+          <a:stretch>
+            <a:fillRect/>
+          </a:stretch>
+        </p:blipFill>
+        <p:spPr>
+          <a:xfrm>
+            <a:off x="561974" y="3879636"/>
+            <a:ext cx="10429875" cy="2721167"/>
+          </a:xfrm>
+          <a:prstGeom prst="rect">
+            <a:avLst/>
+          </a:prstGeom>
+        </p:spPr>
+      </p:pic>
+      <p:sp>
+        <p:nvSpPr>
+          <p:cNvPr id="12" name="화살표: 아래쪽 11">
+            <a:extLst>
+              <a:ext uri="{FF2B5EF4-FFF2-40B4-BE49-F238E27FC236}">
+                <a16:creationId xmlns:a16="http://schemas.microsoft.com/office/drawing/2014/main" id="{B199949C-A465-F197-ECEE-8E12CEC0D5A4}"/>
+              </a:ext>
+            </a:extLst>
+          </p:cNvPr>
+          <p:cNvSpPr/>
+          <p:nvPr/>
+        </p:nvSpPr>
+        <p:spPr>
+          <a:xfrm rot="3593162">
+            <a:off x="4562473" y="2576665"/>
+            <a:ext cx="295275" cy="1514475"/>
+          </a:xfrm>
+          <a:prstGeom prst="downArrow">
+            <a:avLst/>
+          </a:prstGeom>
+        </p:spPr>
+        <p:style>
+          <a:lnRef idx="2">
+            <a:schemeClr val="accent1">
+              <a:shade val="15000"/>
+            </a:schemeClr>
+          </a:lnRef>
+          <a:fillRef idx="1">
+            <a:schemeClr val="accent1"/>
+          </a:fillRef>
+          <a:effectRef idx="0">
+            <a:schemeClr val="accent1"/>
+          </a:effectRef>
+          <a:fontRef idx="minor">
+            <a:schemeClr val="lt1"/>
+          </a:fontRef>
+        </p:style>
+        <p:txBody>
+          <a:bodyPr rtlCol="0" anchor="ctr"/>
+          <a:lstStyle/>
+          <a:p>
+            <a:pPr algn="ctr"/>
             <a:endParaRPr lang="ko-KR" altLang="en-US"/>
           </a:p>
         </p:txBody>
       </p:sp>
       <p:sp>
         <p:nvSpPr>
-          <p:cNvPr id="3" name="내용 개체 틀 2">
-            <a:extLst>
-              <a:ext uri="{FF2B5EF4-FFF2-40B4-BE49-F238E27FC236}">
-                <a16:creationId xmlns:a16="http://schemas.microsoft.com/office/drawing/2014/main" id="{948E1775-BAFE-C732-8AFC-1600DE6E2B97}"/>
-              </a:ext>
-            </a:extLst>
-          </p:cNvPr>
-          <p:cNvSpPr>
-            <a:spLocks noGrp="1"/>
-          </p:cNvSpPr>
-          <p:nvPr>
-            <p:ph idx="1"/>
-          </p:nvPr>
-        </p:nvSpPr>
-        <p:spPr/>
-        <p:txBody>
-          <a:bodyPr/>
-          <a:lstStyle/>
-          <a:p>
+          <p:cNvPr id="13" name="화살표: 아래쪽 12">
+            <a:extLst>
+              <a:ext uri="{FF2B5EF4-FFF2-40B4-BE49-F238E27FC236}">
+                <a16:creationId xmlns:a16="http://schemas.microsoft.com/office/drawing/2014/main" id="{4AC634AD-CBE9-02CB-851F-4B8A79195299}"/>
+              </a:ext>
+            </a:extLst>
+          </p:cNvPr>
+          <p:cNvSpPr/>
+          <p:nvPr/>
+        </p:nvSpPr>
+        <p:spPr>
+          <a:xfrm rot="16200000">
+            <a:off x="4062414" y="4935418"/>
+            <a:ext cx="638175" cy="609600"/>
+          </a:xfrm>
+          <a:prstGeom prst="downArrow">
+            <a:avLst/>
+          </a:prstGeom>
+        </p:spPr>
+        <p:style>
+          <a:lnRef idx="2">
+            <a:schemeClr val="accent1">
+              <a:shade val="15000"/>
+            </a:schemeClr>
+          </a:lnRef>
+          <a:fillRef idx="1">
+            <a:schemeClr val="accent1"/>
+          </a:fillRef>
+          <a:effectRef idx="0">
+            <a:schemeClr val="accent1"/>
+          </a:effectRef>
+          <a:fontRef idx="minor">
+            <a:schemeClr val="lt1"/>
+          </a:fontRef>
+        </p:style>
+        <p:txBody>
+          <a:bodyPr rtlCol="0" anchor="ctr"/>
+          <a:lstStyle/>
+          <a:p>
+            <a:pPr algn="ctr"/>
             <a:endParaRPr lang="ko-KR" altLang="en-US"/>
+          </a:p>
+        </p:txBody>
+      </p:sp>
+      <p:sp>
+        <p:nvSpPr>
+          <p:cNvPr id="14" name="화살표: 아래쪽 13">
+            <a:extLst>
+              <a:ext uri="{FF2B5EF4-FFF2-40B4-BE49-F238E27FC236}">
+                <a16:creationId xmlns:a16="http://schemas.microsoft.com/office/drawing/2014/main" id="{2F4075C2-8E0D-1799-B78C-3B17F60DFFC8}"/>
+              </a:ext>
+            </a:extLst>
+          </p:cNvPr>
+          <p:cNvSpPr/>
+          <p:nvPr/>
+        </p:nvSpPr>
+        <p:spPr>
+          <a:xfrm rot="16200000">
+            <a:off x="7400925" y="4997330"/>
+            <a:ext cx="704850" cy="552450"/>
+          </a:xfrm>
+          <a:prstGeom prst="downArrow">
+            <a:avLst/>
+          </a:prstGeom>
+        </p:spPr>
+        <p:style>
+          <a:lnRef idx="2">
+            <a:schemeClr val="accent1">
+              <a:shade val="15000"/>
+            </a:schemeClr>
+          </a:lnRef>
+          <a:fillRef idx="1">
+            <a:schemeClr val="accent1"/>
+          </a:fillRef>
+          <a:effectRef idx="0">
+            <a:schemeClr val="accent1"/>
+          </a:effectRef>
+          <a:fontRef idx="minor">
+            <a:schemeClr val="lt1"/>
+          </a:fontRef>
+        </p:style>
+        <p:txBody>
+          <a:bodyPr rtlCol="0" anchor="ctr"/>
+          <a:lstStyle/>
+          <a:p>
+            <a:pPr algn="ctr"/>
+            <a:endParaRPr lang="ko-KR" altLang="en-US"/>
+          </a:p>
+        </p:txBody>
+      </p:sp>
+      <p:sp>
+        <p:nvSpPr>
+          <p:cNvPr id="15" name="TextBox 14">
+            <a:extLst>
+              <a:ext uri="{FF2B5EF4-FFF2-40B4-BE49-F238E27FC236}">
+                <a16:creationId xmlns:a16="http://schemas.microsoft.com/office/drawing/2014/main" id="{0E216326-341F-6794-AD32-AB3C77903B91}"/>
+              </a:ext>
+            </a:extLst>
+          </p:cNvPr>
+          <p:cNvSpPr txBox="1"/>
+          <p:nvPr/>
+        </p:nvSpPr>
+        <p:spPr>
+          <a:xfrm>
+            <a:off x="383382" y="819150"/>
+            <a:ext cx="3693319" cy="369332"/>
+          </a:xfrm>
+          <a:prstGeom prst="rect">
+            <a:avLst/>
+          </a:prstGeom>
+          <a:noFill/>
+        </p:spPr>
+        <p:txBody>
+          <a:bodyPr wrap="none" rtlCol="0">
+            <a:spAutoFit/>
+          </a:bodyPr>
+          <a:lstStyle/>
+          <a:p>
+            <a:r>
+              <a:rPr lang="en-US" altLang="ko-KR" dirty="0"/>
+              <a:t>Steam </a:t>
+            </a:r>
+            <a:r>
+              <a:rPr lang="ko-KR" altLang="en-US" dirty="0"/>
+              <a:t>사이트 로그인 및 회원가입</a:t>
+            </a:r>
           </a:p>
         </p:txBody>
       </p:sp>
     </p:spTree>
     <p:extLst>
       <p:ext uri="{BB962C8B-B14F-4D97-AF65-F5344CB8AC3E}">
-        <p14:creationId xmlns:p14="http://schemas.microsoft.com/office/powerpoint/2010/main" val="177164395"/>
+        <p14:creationId xmlns:p14="http://schemas.microsoft.com/office/powerpoint/2010/main" val="2256381207"/>
       </p:ext>
     </p:extLst>
   </p:cSld>
@@ -3469,60 +3746,427 @@
           <a:chExt cx="0" cy="0"/>
         </a:xfrm>
       </p:grpSpPr>
-      <p:sp>
-        <p:nvSpPr>
-          <p:cNvPr id="2" name="제목 1">
-            <a:extLst>
-              <a:ext uri="{FF2B5EF4-FFF2-40B4-BE49-F238E27FC236}">
-                <a16:creationId xmlns:a16="http://schemas.microsoft.com/office/drawing/2014/main" id="{F5BA1EDE-00B5-13E0-B023-9FF8DABA7CD6}"/>
-              </a:ext>
-            </a:extLst>
-          </p:cNvPr>
-          <p:cNvSpPr>
-            <a:spLocks noGrp="1"/>
-          </p:cNvSpPr>
-          <p:nvPr>
-            <p:ph type="title"/>
-          </p:nvPr>
-        </p:nvSpPr>
-        <p:spPr/>
-        <p:txBody>
-          <a:bodyPr/>
-          <a:lstStyle/>
-          <a:p>
-            <a:endParaRPr lang="ko-KR" altLang="en-US"/>
-          </a:p>
-        </p:txBody>
-      </p:sp>
-      <p:sp>
-        <p:nvSpPr>
-          <p:cNvPr id="3" name="내용 개체 틀 2">
-            <a:extLst>
-              <a:ext uri="{FF2B5EF4-FFF2-40B4-BE49-F238E27FC236}">
-                <a16:creationId xmlns:a16="http://schemas.microsoft.com/office/drawing/2014/main" id="{A6EA0C19-4A48-450D-9FE5-EA587D8A08DD}"/>
-              </a:ext>
-            </a:extLst>
-          </p:cNvPr>
-          <p:cNvSpPr>
-            <a:spLocks noGrp="1"/>
-          </p:cNvSpPr>
-          <p:nvPr>
-            <p:ph idx="1"/>
-          </p:nvPr>
-        </p:nvSpPr>
-        <p:spPr/>
-        <p:txBody>
-          <a:bodyPr/>
-          <a:lstStyle/>
-          <a:p>
-            <a:endParaRPr lang="ko-KR" altLang="en-US"/>
-          </a:p>
-        </p:txBody>
-      </p:sp>
+      <p:pic>
+        <p:nvPicPr>
+          <p:cNvPr id="5" name="그림 4">
+            <a:extLst>
+              <a:ext uri="{FF2B5EF4-FFF2-40B4-BE49-F238E27FC236}">
+                <a16:creationId xmlns:a16="http://schemas.microsoft.com/office/drawing/2014/main" id="{47811EE2-5726-61D3-23D1-3BE8C84BC683}"/>
+              </a:ext>
+            </a:extLst>
+          </p:cNvPr>
+          <p:cNvPicPr>
+            <a:picLocks noChangeAspect="1"/>
+          </p:cNvPicPr>
+          <p:nvPr/>
+        </p:nvPicPr>
+        <p:blipFill>
+          <a:blip r:embed="rId2">
+            <a:extLst>
+              <a:ext uri="{28A0092B-C50C-407E-A947-70E740481C1C}">
+                <a14:useLocalDpi xmlns:a14="http://schemas.microsoft.com/office/drawing/2010/main" val="0"/>
+              </a:ext>
+            </a:extLst>
+          </a:blip>
+          <a:stretch>
+            <a:fillRect/>
+          </a:stretch>
+        </p:blipFill>
+        <p:spPr>
+          <a:xfrm>
+            <a:off x="961181" y="0"/>
+            <a:ext cx="10269638" cy="6858000"/>
+          </a:xfrm>
+          <a:prstGeom prst="rect">
+            <a:avLst/>
+          </a:prstGeom>
+        </p:spPr>
+      </p:pic>
+    </p:spTree>
+    <p:extLst>
+      <p:ext uri="{BB962C8B-B14F-4D97-AF65-F5344CB8AC3E}">
+        <p14:creationId xmlns:p14="http://schemas.microsoft.com/office/powerpoint/2010/main" val="2375047111"/>
+      </p:ext>
+    </p:extLst>
+  </p:cSld>
+  <p:clrMapOvr>
+    <a:masterClrMapping/>
+  </p:clrMapOvr>
+</p:sld>
+</file>
+
+<file path=ppt/slides/slide4.xml><?xml version="1.0" encoding="utf-8"?>
+<p:sld xmlns:a="http://schemas.openxmlformats.org/drawingml/2006/main" xmlns:r="http://schemas.openxmlformats.org/officeDocument/2006/relationships" xmlns:p="http://schemas.openxmlformats.org/presentationml/2006/main">
+  <p:cSld>
+    <p:spTree>
+      <p:nvGrpSpPr>
+        <p:cNvPr id="1" name=""/>
+        <p:cNvGrpSpPr/>
+        <p:nvPr/>
+      </p:nvGrpSpPr>
+      <p:grpSpPr>
+        <a:xfrm>
+          <a:off x="0" y="0"/>
+          <a:ext cx="0" cy="0"/>
+          <a:chOff x="0" y="0"/>
+          <a:chExt cx="0" cy="0"/>
+        </a:xfrm>
+      </p:grpSpPr>
+      <p:pic>
+        <p:nvPicPr>
+          <p:cNvPr id="5" name="그림 4">
+            <a:extLst>
+              <a:ext uri="{FF2B5EF4-FFF2-40B4-BE49-F238E27FC236}">
+                <a16:creationId xmlns:a16="http://schemas.microsoft.com/office/drawing/2014/main" id="{2968AFD3-0CB8-7CD5-9962-8D5C6AA335C2}"/>
+              </a:ext>
+            </a:extLst>
+          </p:cNvPr>
+          <p:cNvPicPr>
+            <a:picLocks noChangeAspect="1"/>
+          </p:cNvPicPr>
+          <p:nvPr/>
+        </p:nvPicPr>
+        <p:blipFill>
+          <a:blip r:embed="rId2">
+            <a:extLst>
+              <a:ext uri="{28A0092B-C50C-407E-A947-70E740481C1C}">
+                <a14:useLocalDpi xmlns:a14="http://schemas.microsoft.com/office/drawing/2010/main" val="0"/>
+              </a:ext>
+            </a:extLst>
+          </a:blip>
+          <a:stretch>
+            <a:fillRect/>
+          </a:stretch>
+        </p:blipFill>
+        <p:spPr>
+          <a:xfrm>
+            <a:off x="961181" y="0"/>
+            <a:ext cx="10269638" cy="6858000"/>
+          </a:xfrm>
+          <a:prstGeom prst="rect">
+            <a:avLst/>
+          </a:prstGeom>
+        </p:spPr>
+      </p:pic>
+      <p:pic>
+        <p:nvPicPr>
+          <p:cNvPr id="7" name="그림 6">
+            <a:extLst>
+              <a:ext uri="{FF2B5EF4-FFF2-40B4-BE49-F238E27FC236}">
+                <a16:creationId xmlns:a16="http://schemas.microsoft.com/office/drawing/2014/main" id="{6270E2F8-6386-9731-7150-023F249E5646}"/>
+              </a:ext>
+            </a:extLst>
+          </p:cNvPr>
+          <p:cNvPicPr>
+            <a:picLocks noChangeAspect="1"/>
+          </p:cNvPicPr>
+          <p:nvPr/>
+        </p:nvPicPr>
+        <p:blipFill>
+          <a:blip r:embed="rId3">
+            <a:extLst>
+              <a:ext uri="{28A0092B-C50C-407E-A947-70E740481C1C}">
+                <a14:useLocalDpi xmlns:a14="http://schemas.microsoft.com/office/drawing/2010/main" val="0"/>
+              </a:ext>
+            </a:extLst>
+          </a:blip>
+          <a:stretch>
+            <a:fillRect/>
+          </a:stretch>
+        </p:blipFill>
+        <p:spPr>
+          <a:xfrm>
+            <a:off x="868573" y="0"/>
+            <a:ext cx="10454853" cy="6858000"/>
+          </a:xfrm>
+          <a:prstGeom prst="rect">
+            <a:avLst/>
+          </a:prstGeom>
+        </p:spPr>
+      </p:pic>
     </p:spTree>
     <p:extLst>
       <p:ext uri="{BB962C8B-B14F-4D97-AF65-F5344CB8AC3E}">
         <p14:creationId xmlns:p14="http://schemas.microsoft.com/office/powerpoint/2010/main" val="614001514"/>
+      </p:ext>
+    </p:extLst>
+  </p:cSld>
+  <p:clrMapOvr>
+    <a:masterClrMapping/>
+  </p:clrMapOvr>
+</p:sld>
+</file>
+
+<file path=ppt/slides/slide5.xml><?xml version="1.0" encoding="utf-8"?>
+<p:sld xmlns:a="http://schemas.openxmlformats.org/drawingml/2006/main" xmlns:r="http://schemas.openxmlformats.org/officeDocument/2006/relationships" xmlns:p="http://schemas.openxmlformats.org/presentationml/2006/main">
+  <p:cSld>
+    <p:spTree>
+      <p:nvGrpSpPr>
+        <p:cNvPr id="1" name=""/>
+        <p:cNvGrpSpPr/>
+        <p:nvPr/>
+      </p:nvGrpSpPr>
+      <p:grpSpPr>
+        <a:xfrm>
+          <a:off x="0" y="0"/>
+          <a:ext cx="0" cy="0"/>
+          <a:chOff x="0" y="0"/>
+          <a:chExt cx="0" cy="0"/>
+        </a:xfrm>
+      </p:grpSpPr>
+      <p:pic>
+        <p:nvPicPr>
+          <p:cNvPr id="9" name="그림 8">
+            <a:extLst>
+              <a:ext uri="{FF2B5EF4-FFF2-40B4-BE49-F238E27FC236}">
+                <a16:creationId xmlns:a16="http://schemas.microsoft.com/office/drawing/2014/main" id="{BBA1D2DD-2380-C97E-F900-3D16B1E4A9EE}"/>
+              </a:ext>
+            </a:extLst>
+          </p:cNvPr>
+          <p:cNvPicPr>
+            <a:picLocks noChangeAspect="1"/>
+          </p:cNvPicPr>
+          <p:nvPr/>
+        </p:nvPicPr>
+        <p:blipFill>
+          <a:blip r:embed="rId2">
+            <a:extLst>
+              <a:ext uri="{28A0092B-C50C-407E-A947-70E740481C1C}">
+                <a14:useLocalDpi xmlns:a14="http://schemas.microsoft.com/office/drawing/2010/main" val="0"/>
+              </a:ext>
+            </a:extLst>
+          </a:blip>
+          <a:stretch>
+            <a:fillRect/>
+          </a:stretch>
+        </p:blipFill>
+        <p:spPr>
+          <a:xfrm>
+            <a:off x="0" y="1800225"/>
+            <a:ext cx="5966218" cy="3181983"/>
+          </a:xfrm>
+          <a:prstGeom prst="rect">
+            <a:avLst/>
+          </a:prstGeom>
+        </p:spPr>
+      </p:pic>
+      <p:pic>
+        <p:nvPicPr>
+          <p:cNvPr id="11" name="그림 10">
+            <a:extLst>
+              <a:ext uri="{FF2B5EF4-FFF2-40B4-BE49-F238E27FC236}">
+                <a16:creationId xmlns:a16="http://schemas.microsoft.com/office/drawing/2014/main" id="{9315F848-65A7-240E-3C85-C5F4277CD3D1}"/>
+              </a:ext>
+            </a:extLst>
+          </p:cNvPr>
+          <p:cNvPicPr>
+            <a:picLocks noChangeAspect="1"/>
+          </p:cNvPicPr>
+          <p:nvPr/>
+        </p:nvPicPr>
+        <p:blipFill>
+          <a:blip r:embed="rId3">
+            <a:extLst>
+              <a:ext uri="{28A0092B-C50C-407E-A947-70E740481C1C}">
+                <a14:useLocalDpi xmlns:a14="http://schemas.microsoft.com/office/drawing/2010/main" val="0"/>
+              </a:ext>
+            </a:extLst>
+          </a:blip>
+          <a:stretch>
+            <a:fillRect/>
+          </a:stretch>
+        </p:blipFill>
+        <p:spPr>
+          <a:xfrm>
+            <a:off x="6225782" y="1800225"/>
+            <a:ext cx="5966218" cy="3181983"/>
+          </a:xfrm>
+          <a:prstGeom prst="rect">
+            <a:avLst/>
+          </a:prstGeom>
+        </p:spPr>
+      </p:pic>
+      <p:sp>
+        <p:nvSpPr>
+          <p:cNvPr id="12" name="TextBox 11">
+            <a:extLst>
+              <a:ext uri="{FF2B5EF4-FFF2-40B4-BE49-F238E27FC236}">
+                <a16:creationId xmlns:a16="http://schemas.microsoft.com/office/drawing/2014/main" id="{213A03C3-1653-2844-1598-B0993CDC06DE}"/>
+              </a:ext>
+            </a:extLst>
+          </p:cNvPr>
+          <p:cNvSpPr txBox="1"/>
+          <p:nvPr/>
+        </p:nvSpPr>
+        <p:spPr>
+          <a:xfrm>
+            <a:off x="0" y="1228725"/>
+            <a:ext cx="1939890" cy="369332"/>
+          </a:xfrm>
+          <a:prstGeom prst="rect">
+            <a:avLst/>
+          </a:prstGeom>
+          <a:noFill/>
+        </p:spPr>
+        <p:txBody>
+          <a:bodyPr wrap="none" rtlCol="0">
+            <a:spAutoFit/>
+          </a:bodyPr>
+          <a:lstStyle/>
+          <a:p>
+            <a:r>
+              <a:rPr lang="en-US" altLang="ko-KR" dirty="0" err="1"/>
+              <a:t>Login_Wireframe</a:t>
+            </a:r>
+            <a:endParaRPr lang="ko-KR" altLang="en-US" dirty="0"/>
+          </a:p>
+        </p:txBody>
+      </p:sp>
+      <p:sp>
+        <p:nvSpPr>
+          <p:cNvPr id="13" name="TextBox 12">
+            <a:extLst>
+              <a:ext uri="{FF2B5EF4-FFF2-40B4-BE49-F238E27FC236}">
+                <a16:creationId xmlns:a16="http://schemas.microsoft.com/office/drawing/2014/main" id="{EBC691D4-A269-E0D2-B9A0-7D506A0E62E0}"/>
+              </a:ext>
+            </a:extLst>
+          </p:cNvPr>
+          <p:cNvSpPr txBox="1"/>
+          <p:nvPr/>
+        </p:nvSpPr>
+        <p:spPr>
+          <a:xfrm flipH="1">
+            <a:off x="6225782" y="1228725"/>
+            <a:ext cx="2354581" cy="646331"/>
+          </a:xfrm>
+          <a:prstGeom prst="rect">
+            <a:avLst/>
+          </a:prstGeom>
+          <a:noFill/>
+        </p:spPr>
+        <p:txBody>
+          <a:bodyPr wrap="square" rtlCol="0">
+            <a:spAutoFit/>
+          </a:bodyPr>
+          <a:lstStyle/>
+          <a:p>
+            <a:r>
+              <a:rPr lang="en-US" altLang="ko-KR" dirty="0" err="1"/>
+              <a:t>Sign_up_Wireframe</a:t>
+            </a:r>
+            <a:endParaRPr lang="ko-KR" altLang="en-US" dirty="0"/>
+          </a:p>
+          <a:p>
+            <a:endParaRPr lang="ko-KR" altLang="en-US" dirty="0"/>
+          </a:p>
+        </p:txBody>
+      </p:sp>
+    </p:spTree>
+    <p:extLst>
+      <p:ext uri="{BB962C8B-B14F-4D97-AF65-F5344CB8AC3E}">
+        <p14:creationId xmlns:p14="http://schemas.microsoft.com/office/powerpoint/2010/main" val="1558719325"/>
+      </p:ext>
+    </p:extLst>
+  </p:cSld>
+  <p:clrMapOvr>
+    <a:masterClrMapping/>
+  </p:clrMapOvr>
+</p:sld>
+</file>
+
+<file path=ppt/slides/slide6.xml><?xml version="1.0" encoding="utf-8"?>
+<p:sld xmlns:a="http://schemas.openxmlformats.org/drawingml/2006/main" xmlns:r="http://schemas.openxmlformats.org/officeDocument/2006/relationships" xmlns:p="http://schemas.openxmlformats.org/presentationml/2006/main">
+  <p:cSld>
+    <p:spTree>
+      <p:nvGrpSpPr>
+        <p:cNvPr id="1" name=""/>
+        <p:cNvGrpSpPr/>
+        <p:nvPr/>
+      </p:nvGrpSpPr>
+      <p:grpSpPr>
+        <a:xfrm>
+          <a:off x="0" y="0"/>
+          <a:ext cx="0" cy="0"/>
+          <a:chOff x="0" y="0"/>
+          <a:chExt cx="0" cy="0"/>
+        </a:xfrm>
+      </p:grpSpPr>
+      <p:pic>
+        <p:nvPicPr>
+          <p:cNvPr id="5" name="그림 4">
+            <a:extLst>
+              <a:ext uri="{FF2B5EF4-FFF2-40B4-BE49-F238E27FC236}">
+                <a16:creationId xmlns:a16="http://schemas.microsoft.com/office/drawing/2014/main" id="{FCF85882-DE65-31AC-9739-8103B561B4DA}"/>
+              </a:ext>
+            </a:extLst>
+          </p:cNvPr>
+          <p:cNvPicPr>
+            <a:picLocks noChangeAspect="1"/>
+          </p:cNvPicPr>
+          <p:nvPr/>
+        </p:nvPicPr>
+        <p:blipFill>
+          <a:blip r:embed="rId2">
+            <a:extLst>
+              <a:ext uri="{28A0092B-C50C-407E-A947-70E740481C1C}">
+                <a14:useLocalDpi xmlns:a14="http://schemas.microsoft.com/office/drawing/2010/main" val="0"/>
+              </a:ext>
+            </a:extLst>
+          </a:blip>
+          <a:stretch>
+            <a:fillRect/>
+          </a:stretch>
+        </p:blipFill>
+        <p:spPr>
+          <a:xfrm>
+            <a:off x="6238876" y="2012950"/>
+            <a:ext cx="5762625" cy="3073400"/>
+          </a:xfrm>
+          <a:prstGeom prst="rect">
+            <a:avLst/>
+          </a:prstGeom>
+        </p:spPr>
+      </p:pic>
+      <p:pic>
+        <p:nvPicPr>
+          <p:cNvPr id="7" name="그림 6">
+            <a:extLst>
+              <a:ext uri="{FF2B5EF4-FFF2-40B4-BE49-F238E27FC236}">
+                <a16:creationId xmlns:a16="http://schemas.microsoft.com/office/drawing/2014/main" id="{1A4E5B26-4539-5BD5-5C59-EB65FF8B55E4}"/>
+              </a:ext>
+            </a:extLst>
+          </p:cNvPr>
+          <p:cNvPicPr>
+            <a:picLocks noChangeAspect="1"/>
+          </p:cNvPicPr>
+          <p:nvPr/>
+        </p:nvPicPr>
+        <p:blipFill>
+          <a:blip r:embed="rId3">
+            <a:extLst>
+              <a:ext uri="{28A0092B-C50C-407E-A947-70E740481C1C}">
+                <a14:useLocalDpi xmlns:a14="http://schemas.microsoft.com/office/drawing/2010/main" val="0"/>
+              </a:ext>
+            </a:extLst>
+          </a:blip>
+          <a:stretch>
+            <a:fillRect/>
+          </a:stretch>
+        </p:blipFill>
+        <p:spPr>
+          <a:xfrm>
+            <a:off x="190501" y="2012950"/>
+            <a:ext cx="5762625" cy="3073400"/>
+          </a:xfrm>
+          <a:prstGeom prst="rect">
+            <a:avLst/>
+          </a:prstGeom>
+        </p:spPr>
+      </p:pic>
+    </p:spTree>
+    <p:extLst>
+      <p:ext uri="{BB962C8B-B14F-4D97-AF65-F5344CB8AC3E}">
+        <p14:creationId xmlns:p14="http://schemas.microsoft.com/office/powerpoint/2010/main" val="177164395"/>
       </p:ext>
     </p:extLst>
   </p:cSld>

--- a/70_pf/steam/프레젠테이션1.pptx
+++ b/70_pf/steam/프레젠테이션1.pptx
@@ -5,12 +5,13 @@
     <p:sldMasterId id="2147483648" r:id="rId1"/>
   </p:sldMasterIdLst>
   <p:sldIdLst>
-    <p:sldId id="261" r:id="rId2"/>
-    <p:sldId id="260" r:id="rId3"/>
-    <p:sldId id="259" r:id="rId4"/>
-    <p:sldId id="258" r:id="rId5"/>
-    <p:sldId id="256" r:id="rId6"/>
-    <p:sldId id="257" r:id="rId7"/>
+    <p:sldId id="262" r:id="rId2"/>
+    <p:sldId id="261" r:id="rId3"/>
+    <p:sldId id="260" r:id="rId4"/>
+    <p:sldId id="259" r:id="rId5"/>
+    <p:sldId id="258" r:id="rId6"/>
+    <p:sldId id="256" r:id="rId7"/>
+    <p:sldId id="257" r:id="rId8"/>
   </p:sldIdLst>
   <p:sldSz cx="12192000" cy="6858000"/>
   <p:notesSz cx="6858000" cy="9144000"/>
@@ -3326,121 +3327,10 @@
           <a:chExt cx="0" cy="0"/>
         </a:xfrm>
       </p:grpSpPr>
-      <p:sp>
-        <p:nvSpPr>
-          <p:cNvPr id="4" name="TextBox 3">
-            <a:extLst>
-              <a:ext uri="{FF2B5EF4-FFF2-40B4-BE49-F238E27FC236}">
-                <a16:creationId xmlns:a16="http://schemas.microsoft.com/office/drawing/2014/main" id="{E51E32E6-FBB3-8DE5-F45F-AB34E2194445}"/>
-              </a:ext>
-            </a:extLst>
-          </p:cNvPr>
-          <p:cNvSpPr txBox="1"/>
-          <p:nvPr/>
-        </p:nvSpPr>
-        <p:spPr>
-          <a:xfrm>
-            <a:off x="609600" y="542925"/>
-            <a:ext cx="1479892" cy="369332"/>
-          </a:xfrm>
-          <a:prstGeom prst="rect">
-            <a:avLst/>
-          </a:prstGeom>
-          <a:noFill/>
-        </p:spPr>
-        <p:txBody>
-          <a:bodyPr wrap="none" rtlCol="0">
-            <a:spAutoFit/>
-          </a:bodyPr>
-          <a:lstStyle/>
-          <a:p>
-            <a:r>
-              <a:rPr lang="en-US" altLang="ko-KR" dirty="0"/>
-              <a:t>Main </a:t>
-            </a:r>
-            <a:r>
-              <a:rPr lang="ko-KR" altLang="en-US" dirty="0"/>
-              <a:t>페이지</a:t>
-            </a:r>
-          </a:p>
-        </p:txBody>
-      </p:sp>
-      <p:pic>
-        <p:nvPicPr>
-          <p:cNvPr id="6" name="그림 5">
-            <a:extLst>
-              <a:ext uri="{FF2B5EF4-FFF2-40B4-BE49-F238E27FC236}">
-                <a16:creationId xmlns:a16="http://schemas.microsoft.com/office/drawing/2014/main" id="{2548A119-533A-5C7B-6E1B-1457E15C0310}"/>
-              </a:ext>
-            </a:extLst>
-          </p:cNvPr>
-          <p:cNvPicPr>
-            <a:picLocks noChangeAspect="1"/>
-          </p:cNvPicPr>
-          <p:nvPr/>
-        </p:nvPicPr>
-        <p:blipFill>
-          <a:blip r:embed="rId2">
-            <a:extLst>
-              <a:ext uri="{28A0092B-C50C-407E-A947-70E740481C1C}">
-                <a14:useLocalDpi xmlns:a14="http://schemas.microsoft.com/office/drawing/2010/main" val="0"/>
-              </a:ext>
-            </a:extLst>
-          </a:blip>
-          <a:stretch>
-            <a:fillRect/>
-          </a:stretch>
-        </p:blipFill>
-        <p:spPr>
-          <a:xfrm>
-            <a:off x="0" y="3429000"/>
-            <a:ext cx="12192000" cy="2540000"/>
-          </a:xfrm>
-          <a:prstGeom prst="rect">
-            <a:avLst/>
-          </a:prstGeom>
-        </p:spPr>
-      </p:pic>
-      <p:pic>
-        <p:nvPicPr>
-          <p:cNvPr id="8" name="그림 7">
-            <a:extLst>
-              <a:ext uri="{FF2B5EF4-FFF2-40B4-BE49-F238E27FC236}">
-                <a16:creationId xmlns:a16="http://schemas.microsoft.com/office/drawing/2014/main" id="{15E6BD9A-C746-BA06-B882-4E6BE13F2503}"/>
-              </a:ext>
-            </a:extLst>
-          </p:cNvPr>
-          <p:cNvPicPr>
-            <a:picLocks noChangeAspect="1"/>
-          </p:cNvPicPr>
-          <p:nvPr/>
-        </p:nvPicPr>
-        <p:blipFill>
-          <a:blip r:embed="rId3">
-            <a:extLst>
-              <a:ext uri="{28A0092B-C50C-407E-A947-70E740481C1C}">
-                <a14:useLocalDpi xmlns:a14="http://schemas.microsoft.com/office/drawing/2010/main" val="0"/>
-              </a:ext>
-            </a:extLst>
-          </a:blip>
-          <a:stretch>
-            <a:fillRect/>
-          </a:stretch>
-        </p:blipFill>
-        <p:spPr>
-          <a:xfrm>
-            <a:off x="0" y="1491178"/>
-            <a:ext cx="12192000" cy="1270000"/>
-          </a:xfrm>
-          <a:prstGeom prst="rect">
-            <a:avLst/>
-          </a:prstGeom>
-        </p:spPr>
-      </p:pic>
     </p:spTree>
     <p:extLst>
       <p:ext uri="{BB962C8B-B14F-4D97-AF65-F5344CB8AC3E}">
-        <p14:creationId xmlns:p14="http://schemas.microsoft.com/office/powerpoint/2010/main" val="1983105398"/>
+        <p14:creationId xmlns:p14="http://schemas.microsoft.com/office/powerpoint/2010/main" val="824877085"/>
       </p:ext>
     </p:extLst>
   </p:cSld>
@@ -3467,12 +3357,51 @@
           <a:chExt cx="0" cy="0"/>
         </a:xfrm>
       </p:grpSpPr>
+      <p:sp>
+        <p:nvSpPr>
+          <p:cNvPr id="4" name="TextBox 3">
+            <a:extLst>
+              <a:ext uri="{FF2B5EF4-FFF2-40B4-BE49-F238E27FC236}">
+                <a16:creationId xmlns:a16="http://schemas.microsoft.com/office/drawing/2014/main" id="{E51E32E6-FBB3-8DE5-F45F-AB34E2194445}"/>
+              </a:ext>
+            </a:extLst>
+          </p:cNvPr>
+          <p:cNvSpPr txBox="1"/>
+          <p:nvPr/>
+        </p:nvSpPr>
+        <p:spPr>
+          <a:xfrm>
+            <a:off x="609600" y="542925"/>
+            <a:ext cx="1479892" cy="369332"/>
+          </a:xfrm>
+          <a:prstGeom prst="rect">
+            <a:avLst/>
+          </a:prstGeom>
+          <a:noFill/>
+        </p:spPr>
+        <p:txBody>
+          <a:bodyPr wrap="none" rtlCol="0">
+            <a:spAutoFit/>
+          </a:bodyPr>
+          <a:lstStyle/>
+          <a:p>
+            <a:r>
+              <a:rPr lang="en-US" altLang="ko-KR" dirty="0"/>
+              <a:t>Main </a:t>
+            </a:r>
+            <a:r>
+              <a:rPr lang="ko-KR" altLang="en-US" dirty="0"/>
+              <a:t>페이지</a:t>
+            </a:r>
+          </a:p>
+        </p:txBody>
+      </p:sp>
       <p:pic>
         <p:nvPicPr>
-          <p:cNvPr id="5" name="그림 4">
-            <a:extLst>
-              <a:ext uri="{FF2B5EF4-FFF2-40B4-BE49-F238E27FC236}">
-                <a16:creationId xmlns:a16="http://schemas.microsoft.com/office/drawing/2014/main" id="{589D6F81-2A41-6ECA-C518-E0C6FACE6ECA}"/>
+          <p:cNvPr id="6" name="그림 5">
+            <a:extLst>
+              <a:ext uri="{FF2B5EF4-FFF2-40B4-BE49-F238E27FC236}">
+                <a16:creationId xmlns:a16="http://schemas.microsoft.com/office/drawing/2014/main" id="{2548A119-533A-5C7B-6E1B-1457E15C0310}"/>
               </a:ext>
             </a:extLst>
           </p:cNvPr>
@@ -3495,8 +3424,8 @@
         </p:blipFill>
         <p:spPr>
           <a:xfrm>
-            <a:off x="4381501" y="257197"/>
-            <a:ext cx="3648074" cy="2978364"/>
+            <a:off x="0" y="3429000"/>
+            <a:ext cx="12192000" cy="2540000"/>
           </a:xfrm>
           <a:prstGeom prst="rect">
             <a:avLst/>
@@ -3505,10 +3434,10 @@
       </p:pic>
       <p:pic>
         <p:nvPicPr>
-          <p:cNvPr id="7" name="그림 6">
-            <a:extLst>
-              <a:ext uri="{FF2B5EF4-FFF2-40B4-BE49-F238E27FC236}">
-                <a16:creationId xmlns:a16="http://schemas.microsoft.com/office/drawing/2014/main" id="{AFDD96F9-12DA-FCF1-9B96-B236D0B683F4}"/>
+          <p:cNvPr id="8" name="그림 7">
+            <a:extLst>
+              <a:ext uri="{FF2B5EF4-FFF2-40B4-BE49-F238E27FC236}">
+                <a16:creationId xmlns:a16="http://schemas.microsoft.com/office/drawing/2014/main" id="{15E6BD9A-C746-BA06-B882-4E6BE13F2503}"/>
               </a:ext>
             </a:extLst>
           </p:cNvPr>
@@ -3531,195 +3460,18 @@
         </p:blipFill>
         <p:spPr>
           <a:xfrm>
-            <a:off x="561974" y="3879636"/>
-            <a:ext cx="10429875" cy="2721167"/>
+            <a:off x="0" y="1491178"/>
+            <a:ext cx="12192000" cy="1270000"/>
           </a:xfrm>
           <a:prstGeom prst="rect">
             <a:avLst/>
           </a:prstGeom>
         </p:spPr>
       </p:pic>
-      <p:sp>
-        <p:nvSpPr>
-          <p:cNvPr id="12" name="화살표: 아래쪽 11">
-            <a:extLst>
-              <a:ext uri="{FF2B5EF4-FFF2-40B4-BE49-F238E27FC236}">
-                <a16:creationId xmlns:a16="http://schemas.microsoft.com/office/drawing/2014/main" id="{B199949C-A465-F197-ECEE-8E12CEC0D5A4}"/>
-              </a:ext>
-            </a:extLst>
-          </p:cNvPr>
-          <p:cNvSpPr/>
-          <p:nvPr/>
-        </p:nvSpPr>
-        <p:spPr>
-          <a:xfrm rot="3593162">
-            <a:off x="4562473" y="2576665"/>
-            <a:ext cx="295275" cy="1514475"/>
-          </a:xfrm>
-          <a:prstGeom prst="downArrow">
-            <a:avLst/>
-          </a:prstGeom>
-        </p:spPr>
-        <p:style>
-          <a:lnRef idx="2">
-            <a:schemeClr val="accent1">
-              <a:shade val="15000"/>
-            </a:schemeClr>
-          </a:lnRef>
-          <a:fillRef idx="1">
-            <a:schemeClr val="accent1"/>
-          </a:fillRef>
-          <a:effectRef idx="0">
-            <a:schemeClr val="accent1"/>
-          </a:effectRef>
-          <a:fontRef idx="minor">
-            <a:schemeClr val="lt1"/>
-          </a:fontRef>
-        </p:style>
-        <p:txBody>
-          <a:bodyPr rtlCol="0" anchor="ctr"/>
-          <a:lstStyle/>
-          <a:p>
-            <a:pPr algn="ctr"/>
-            <a:endParaRPr lang="ko-KR" altLang="en-US"/>
-          </a:p>
-        </p:txBody>
-      </p:sp>
-      <p:sp>
-        <p:nvSpPr>
-          <p:cNvPr id="13" name="화살표: 아래쪽 12">
-            <a:extLst>
-              <a:ext uri="{FF2B5EF4-FFF2-40B4-BE49-F238E27FC236}">
-                <a16:creationId xmlns:a16="http://schemas.microsoft.com/office/drawing/2014/main" id="{4AC634AD-CBE9-02CB-851F-4B8A79195299}"/>
-              </a:ext>
-            </a:extLst>
-          </p:cNvPr>
-          <p:cNvSpPr/>
-          <p:nvPr/>
-        </p:nvSpPr>
-        <p:spPr>
-          <a:xfrm rot="16200000">
-            <a:off x="4062414" y="4935418"/>
-            <a:ext cx="638175" cy="609600"/>
-          </a:xfrm>
-          <a:prstGeom prst="downArrow">
-            <a:avLst/>
-          </a:prstGeom>
-        </p:spPr>
-        <p:style>
-          <a:lnRef idx="2">
-            <a:schemeClr val="accent1">
-              <a:shade val="15000"/>
-            </a:schemeClr>
-          </a:lnRef>
-          <a:fillRef idx="1">
-            <a:schemeClr val="accent1"/>
-          </a:fillRef>
-          <a:effectRef idx="0">
-            <a:schemeClr val="accent1"/>
-          </a:effectRef>
-          <a:fontRef idx="minor">
-            <a:schemeClr val="lt1"/>
-          </a:fontRef>
-        </p:style>
-        <p:txBody>
-          <a:bodyPr rtlCol="0" anchor="ctr"/>
-          <a:lstStyle/>
-          <a:p>
-            <a:pPr algn="ctr"/>
-            <a:endParaRPr lang="ko-KR" altLang="en-US"/>
-          </a:p>
-        </p:txBody>
-      </p:sp>
-      <p:sp>
-        <p:nvSpPr>
-          <p:cNvPr id="14" name="화살표: 아래쪽 13">
-            <a:extLst>
-              <a:ext uri="{FF2B5EF4-FFF2-40B4-BE49-F238E27FC236}">
-                <a16:creationId xmlns:a16="http://schemas.microsoft.com/office/drawing/2014/main" id="{2F4075C2-8E0D-1799-B78C-3B17F60DFFC8}"/>
-              </a:ext>
-            </a:extLst>
-          </p:cNvPr>
-          <p:cNvSpPr/>
-          <p:nvPr/>
-        </p:nvSpPr>
-        <p:spPr>
-          <a:xfrm rot="16200000">
-            <a:off x="7400925" y="4997330"/>
-            <a:ext cx="704850" cy="552450"/>
-          </a:xfrm>
-          <a:prstGeom prst="downArrow">
-            <a:avLst/>
-          </a:prstGeom>
-        </p:spPr>
-        <p:style>
-          <a:lnRef idx="2">
-            <a:schemeClr val="accent1">
-              <a:shade val="15000"/>
-            </a:schemeClr>
-          </a:lnRef>
-          <a:fillRef idx="1">
-            <a:schemeClr val="accent1"/>
-          </a:fillRef>
-          <a:effectRef idx="0">
-            <a:schemeClr val="accent1"/>
-          </a:effectRef>
-          <a:fontRef idx="minor">
-            <a:schemeClr val="lt1"/>
-          </a:fontRef>
-        </p:style>
-        <p:txBody>
-          <a:bodyPr rtlCol="0" anchor="ctr"/>
-          <a:lstStyle/>
-          <a:p>
-            <a:pPr algn="ctr"/>
-            <a:endParaRPr lang="ko-KR" altLang="en-US"/>
-          </a:p>
-        </p:txBody>
-      </p:sp>
-      <p:sp>
-        <p:nvSpPr>
-          <p:cNvPr id="15" name="TextBox 14">
-            <a:extLst>
-              <a:ext uri="{FF2B5EF4-FFF2-40B4-BE49-F238E27FC236}">
-                <a16:creationId xmlns:a16="http://schemas.microsoft.com/office/drawing/2014/main" id="{0E216326-341F-6794-AD32-AB3C77903B91}"/>
-              </a:ext>
-            </a:extLst>
-          </p:cNvPr>
-          <p:cNvSpPr txBox="1"/>
-          <p:nvPr/>
-        </p:nvSpPr>
-        <p:spPr>
-          <a:xfrm>
-            <a:off x="383382" y="819150"/>
-            <a:ext cx="3693319" cy="369332"/>
-          </a:xfrm>
-          <a:prstGeom prst="rect">
-            <a:avLst/>
-          </a:prstGeom>
-          <a:noFill/>
-        </p:spPr>
-        <p:txBody>
-          <a:bodyPr wrap="none" rtlCol="0">
-            <a:spAutoFit/>
-          </a:bodyPr>
-          <a:lstStyle/>
-          <a:p>
-            <a:r>
-              <a:rPr lang="en-US" altLang="ko-KR" dirty="0"/>
-              <a:t>Steam </a:t>
-            </a:r>
-            <a:r>
-              <a:rPr lang="ko-KR" altLang="en-US" dirty="0"/>
-              <a:t>사이트 로그인 및 회원가입</a:t>
-            </a:r>
-          </a:p>
-        </p:txBody>
-      </p:sp>
     </p:spTree>
     <p:extLst>
       <p:ext uri="{BB962C8B-B14F-4D97-AF65-F5344CB8AC3E}">
-        <p14:creationId xmlns:p14="http://schemas.microsoft.com/office/powerpoint/2010/main" val="2256381207"/>
+        <p14:creationId xmlns:p14="http://schemas.microsoft.com/office/powerpoint/2010/main" val="1983105398"/>
       </p:ext>
     </p:extLst>
   </p:cSld>
@@ -3751,7 +3503,7 @@
           <p:cNvPr id="5" name="그림 4">
             <a:extLst>
               <a:ext uri="{FF2B5EF4-FFF2-40B4-BE49-F238E27FC236}">
-                <a16:creationId xmlns:a16="http://schemas.microsoft.com/office/drawing/2014/main" id="{47811EE2-5726-61D3-23D1-3BE8C84BC683}"/>
+                <a16:creationId xmlns:a16="http://schemas.microsoft.com/office/drawing/2014/main" id="{589D6F81-2A41-6ECA-C518-E0C6FACE6ECA}"/>
               </a:ext>
             </a:extLst>
           </p:cNvPr>
@@ -3774,18 +3526,231 @@
         </p:blipFill>
         <p:spPr>
           <a:xfrm>
-            <a:off x="961181" y="0"/>
-            <a:ext cx="10269638" cy="6858000"/>
+            <a:off x="4381501" y="257197"/>
+            <a:ext cx="3648074" cy="2978364"/>
           </a:xfrm>
           <a:prstGeom prst="rect">
             <a:avLst/>
           </a:prstGeom>
         </p:spPr>
       </p:pic>
+      <p:pic>
+        <p:nvPicPr>
+          <p:cNvPr id="7" name="그림 6">
+            <a:extLst>
+              <a:ext uri="{FF2B5EF4-FFF2-40B4-BE49-F238E27FC236}">
+                <a16:creationId xmlns:a16="http://schemas.microsoft.com/office/drawing/2014/main" id="{AFDD96F9-12DA-FCF1-9B96-B236D0B683F4}"/>
+              </a:ext>
+            </a:extLst>
+          </p:cNvPr>
+          <p:cNvPicPr>
+            <a:picLocks noChangeAspect="1"/>
+          </p:cNvPicPr>
+          <p:nvPr/>
+        </p:nvPicPr>
+        <p:blipFill>
+          <a:blip r:embed="rId3">
+            <a:extLst>
+              <a:ext uri="{28A0092B-C50C-407E-A947-70E740481C1C}">
+                <a14:useLocalDpi xmlns:a14="http://schemas.microsoft.com/office/drawing/2010/main" val="0"/>
+              </a:ext>
+            </a:extLst>
+          </a:blip>
+          <a:stretch>
+            <a:fillRect/>
+          </a:stretch>
+        </p:blipFill>
+        <p:spPr>
+          <a:xfrm>
+            <a:off x="561974" y="3879636"/>
+            <a:ext cx="10429875" cy="2721167"/>
+          </a:xfrm>
+          <a:prstGeom prst="rect">
+            <a:avLst/>
+          </a:prstGeom>
+        </p:spPr>
+      </p:pic>
+      <p:sp>
+        <p:nvSpPr>
+          <p:cNvPr id="12" name="화살표: 아래쪽 11">
+            <a:extLst>
+              <a:ext uri="{FF2B5EF4-FFF2-40B4-BE49-F238E27FC236}">
+                <a16:creationId xmlns:a16="http://schemas.microsoft.com/office/drawing/2014/main" id="{B199949C-A465-F197-ECEE-8E12CEC0D5A4}"/>
+              </a:ext>
+            </a:extLst>
+          </p:cNvPr>
+          <p:cNvSpPr/>
+          <p:nvPr/>
+        </p:nvSpPr>
+        <p:spPr>
+          <a:xfrm rot="3593162">
+            <a:off x="4562473" y="2576665"/>
+            <a:ext cx="295275" cy="1514475"/>
+          </a:xfrm>
+          <a:prstGeom prst="downArrow">
+            <a:avLst/>
+          </a:prstGeom>
+        </p:spPr>
+        <p:style>
+          <a:lnRef idx="2">
+            <a:schemeClr val="accent1">
+              <a:shade val="15000"/>
+            </a:schemeClr>
+          </a:lnRef>
+          <a:fillRef idx="1">
+            <a:schemeClr val="accent1"/>
+          </a:fillRef>
+          <a:effectRef idx="0">
+            <a:schemeClr val="accent1"/>
+          </a:effectRef>
+          <a:fontRef idx="minor">
+            <a:schemeClr val="lt1"/>
+          </a:fontRef>
+        </p:style>
+        <p:txBody>
+          <a:bodyPr rtlCol="0" anchor="ctr"/>
+          <a:lstStyle/>
+          <a:p>
+            <a:pPr algn="ctr"/>
+            <a:endParaRPr lang="ko-KR" altLang="en-US"/>
+          </a:p>
+        </p:txBody>
+      </p:sp>
+      <p:sp>
+        <p:nvSpPr>
+          <p:cNvPr id="13" name="화살표: 아래쪽 12">
+            <a:extLst>
+              <a:ext uri="{FF2B5EF4-FFF2-40B4-BE49-F238E27FC236}">
+                <a16:creationId xmlns:a16="http://schemas.microsoft.com/office/drawing/2014/main" id="{4AC634AD-CBE9-02CB-851F-4B8A79195299}"/>
+              </a:ext>
+            </a:extLst>
+          </p:cNvPr>
+          <p:cNvSpPr/>
+          <p:nvPr/>
+        </p:nvSpPr>
+        <p:spPr>
+          <a:xfrm rot="16200000">
+            <a:off x="4062414" y="4935418"/>
+            <a:ext cx="638175" cy="609600"/>
+          </a:xfrm>
+          <a:prstGeom prst="downArrow">
+            <a:avLst/>
+          </a:prstGeom>
+        </p:spPr>
+        <p:style>
+          <a:lnRef idx="2">
+            <a:schemeClr val="accent1">
+              <a:shade val="15000"/>
+            </a:schemeClr>
+          </a:lnRef>
+          <a:fillRef idx="1">
+            <a:schemeClr val="accent1"/>
+          </a:fillRef>
+          <a:effectRef idx="0">
+            <a:schemeClr val="accent1"/>
+          </a:effectRef>
+          <a:fontRef idx="minor">
+            <a:schemeClr val="lt1"/>
+          </a:fontRef>
+        </p:style>
+        <p:txBody>
+          <a:bodyPr rtlCol="0" anchor="ctr"/>
+          <a:lstStyle/>
+          <a:p>
+            <a:pPr algn="ctr"/>
+            <a:endParaRPr lang="ko-KR" altLang="en-US"/>
+          </a:p>
+        </p:txBody>
+      </p:sp>
+      <p:sp>
+        <p:nvSpPr>
+          <p:cNvPr id="14" name="화살표: 아래쪽 13">
+            <a:extLst>
+              <a:ext uri="{FF2B5EF4-FFF2-40B4-BE49-F238E27FC236}">
+                <a16:creationId xmlns:a16="http://schemas.microsoft.com/office/drawing/2014/main" id="{2F4075C2-8E0D-1799-B78C-3B17F60DFFC8}"/>
+              </a:ext>
+            </a:extLst>
+          </p:cNvPr>
+          <p:cNvSpPr/>
+          <p:nvPr/>
+        </p:nvSpPr>
+        <p:spPr>
+          <a:xfrm rot="16200000">
+            <a:off x="7400925" y="4997330"/>
+            <a:ext cx="704850" cy="552450"/>
+          </a:xfrm>
+          <a:prstGeom prst="downArrow">
+            <a:avLst/>
+          </a:prstGeom>
+        </p:spPr>
+        <p:style>
+          <a:lnRef idx="2">
+            <a:schemeClr val="accent1">
+              <a:shade val="15000"/>
+            </a:schemeClr>
+          </a:lnRef>
+          <a:fillRef idx="1">
+            <a:schemeClr val="accent1"/>
+          </a:fillRef>
+          <a:effectRef idx="0">
+            <a:schemeClr val="accent1"/>
+          </a:effectRef>
+          <a:fontRef idx="minor">
+            <a:schemeClr val="lt1"/>
+          </a:fontRef>
+        </p:style>
+        <p:txBody>
+          <a:bodyPr rtlCol="0" anchor="ctr"/>
+          <a:lstStyle/>
+          <a:p>
+            <a:pPr algn="ctr"/>
+            <a:endParaRPr lang="ko-KR" altLang="en-US"/>
+          </a:p>
+        </p:txBody>
+      </p:sp>
+      <p:sp>
+        <p:nvSpPr>
+          <p:cNvPr id="15" name="TextBox 14">
+            <a:extLst>
+              <a:ext uri="{FF2B5EF4-FFF2-40B4-BE49-F238E27FC236}">
+                <a16:creationId xmlns:a16="http://schemas.microsoft.com/office/drawing/2014/main" id="{0E216326-341F-6794-AD32-AB3C77903B91}"/>
+              </a:ext>
+            </a:extLst>
+          </p:cNvPr>
+          <p:cNvSpPr txBox="1"/>
+          <p:nvPr/>
+        </p:nvSpPr>
+        <p:spPr>
+          <a:xfrm>
+            <a:off x="383382" y="819150"/>
+            <a:ext cx="3693319" cy="369332"/>
+          </a:xfrm>
+          <a:prstGeom prst="rect">
+            <a:avLst/>
+          </a:prstGeom>
+          <a:noFill/>
+        </p:spPr>
+        <p:txBody>
+          <a:bodyPr wrap="none" rtlCol="0">
+            <a:spAutoFit/>
+          </a:bodyPr>
+          <a:lstStyle/>
+          <a:p>
+            <a:r>
+              <a:rPr lang="en-US" altLang="ko-KR" dirty="0"/>
+              <a:t>Steam </a:t>
+            </a:r>
+            <a:r>
+              <a:rPr lang="ko-KR" altLang="en-US" dirty="0"/>
+              <a:t>사이트 로그인 및 회원가입</a:t>
+            </a:r>
+          </a:p>
+        </p:txBody>
+      </p:sp>
     </p:spTree>
     <p:extLst>
       <p:ext uri="{BB962C8B-B14F-4D97-AF65-F5344CB8AC3E}">
-        <p14:creationId xmlns:p14="http://schemas.microsoft.com/office/powerpoint/2010/main" val="2375047111"/>
+        <p14:creationId xmlns:p14="http://schemas.microsoft.com/office/powerpoint/2010/main" val="2256381207"/>
       </p:ext>
     </p:extLst>
   </p:cSld>
@@ -3817,6 +3782,72 @@
           <p:cNvPr id="5" name="그림 4">
             <a:extLst>
               <a:ext uri="{FF2B5EF4-FFF2-40B4-BE49-F238E27FC236}">
+                <a16:creationId xmlns:a16="http://schemas.microsoft.com/office/drawing/2014/main" id="{47811EE2-5726-61D3-23D1-3BE8C84BC683}"/>
+              </a:ext>
+            </a:extLst>
+          </p:cNvPr>
+          <p:cNvPicPr>
+            <a:picLocks noChangeAspect="1"/>
+          </p:cNvPicPr>
+          <p:nvPr/>
+        </p:nvPicPr>
+        <p:blipFill>
+          <a:blip r:embed="rId2">
+            <a:extLst>
+              <a:ext uri="{28A0092B-C50C-407E-A947-70E740481C1C}">
+                <a14:useLocalDpi xmlns:a14="http://schemas.microsoft.com/office/drawing/2010/main" val="0"/>
+              </a:ext>
+            </a:extLst>
+          </a:blip>
+          <a:stretch>
+            <a:fillRect/>
+          </a:stretch>
+        </p:blipFill>
+        <p:spPr>
+          <a:xfrm>
+            <a:off x="961181" y="0"/>
+            <a:ext cx="10269638" cy="6858000"/>
+          </a:xfrm>
+          <a:prstGeom prst="rect">
+            <a:avLst/>
+          </a:prstGeom>
+        </p:spPr>
+      </p:pic>
+    </p:spTree>
+    <p:extLst>
+      <p:ext uri="{BB962C8B-B14F-4D97-AF65-F5344CB8AC3E}">
+        <p14:creationId xmlns:p14="http://schemas.microsoft.com/office/powerpoint/2010/main" val="2375047111"/>
+      </p:ext>
+    </p:extLst>
+  </p:cSld>
+  <p:clrMapOvr>
+    <a:masterClrMapping/>
+  </p:clrMapOvr>
+</p:sld>
+</file>
+
+<file path=ppt/slides/slide5.xml><?xml version="1.0" encoding="utf-8"?>
+<p:sld xmlns:a="http://schemas.openxmlformats.org/drawingml/2006/main" xmlns:r="http://schemas.openxmlformats.org/officeDocument/2006/relationships" xmlns:p="http://schemas.openxmlformats.org/presentationml/2006/main">
+  <p:cSld>
+    <p:spTree>
+      <p:nvGrpSpPr>
+        <p:cNvPr id="1" name=""/>
+        <p:cNvGrpSpPr/>
+        <p:nvPr/>
+      </p:nvGrpSpPr>
+      <p:grpSpPr>
+        <a:xfrm>
+          <a:off x="0" y="0"/>
+          <a:ext cx="0" cy="0"/>
+          <a:chOff x="0" y="0"/>
+          <a:chExt cx="0" cy="0"/>
+        </a:xfrm>
+      </p:grpSpPr>
+      <p:pic>
+        <p:nvPicPr>
+          <p:cNvPr id="5" name="그림 4">
+            <a:extLst>
+              <a:ext uri="{FF2B5EF4-FFF2-40B4-BE49-F238E27FC236}">
                 <a16:creationId xmlns:a16="http://schemas.microsoft.com/office/drawing/2014/main" id="{2968AFD3-0CB8-7CD5-9962-8D5C6AA335C2}"/>
               </a:ext>
             </a:extLst>
@@ -3897,7 +3928,7 @@
 </p:sld>
 </file>
 
-<file path=ppt/slides/slide5.xml><?xml version="1.0" encoding="utf-8"?>
+<file path=ppt/slides/slide6.xml><?xml version="1.0" encoding="utf-8"?>
 <p:sld xmlns:a="http://schemas.openxmlformats.org/drawingml/2006/main" xmlns:r="http://schemas.openxmlformats.org/officeDocument/2006/relationships" xmlns:p="http://schemas.openxmlformats.org/presentationml/2006/main">
   <p:cSld>
     <p:spTree>
@@ -4074,7 +4105,7 @@
 </p:sld>
 </file>
 
-<file path=ppt/slides/slide6.xml><?xml version="1.0" encoding="utf-8"?>
+<file path=ppt/slides/slide7.xml><?xml version="1.0" encoding="utf-8"?>
 <p:sld xmlns:a="http://schemas.openxmlformats.org/drawingml/2006/main" xmlns:r="http://schemas.openxmlformats.org/officeDocument/2006/relationships" xmlns:p="http://schemas.openxmlformats.org/presentationml/2006/main">
   <p:cSld>
     <p:spTree>

--- a/70_pf/steam/프레젠테이션1.pptx
+++ b/70_pf/steam/프레젠테이션1.pptx
@@ -1,17 +1,16 @@
 
 <file path=ppt/presentation.xml><?xml version="1.0" encoding="utf-8"?>
-<p:presentation xmlns:a="http://schemas.openxmlformats.org/drawingml/2006/main" xmlns:r="http://schemas.openxmlformats.org/officeDocument/2006/relationships" xmlns:p="http://schemas.openxmlformats.org/presentationml/2006/main" saveSubsetFonts="1">
+<p:presentation xmlns:a="http://schemas.openxmlformats.org/drawingml/2006/main" xmlns:r="http://schemas.openxmlformats.org/officeDocument/2006/relationships" xmlns:p="http://schemas.openxmlformats.org/presentationml/2006/main" xmlns:p14="http://schemas.microsoft.com/office/powerpoint/2010/main" saveSubsetFonts="1">
   <p:sldMasterIdLst>
-    <p:sldMasterId id="2147483648" r:id="rId1"/>
+    <p:sldMasterId id="2147483661" r:id="rId13"/>
   </p:sldMasterIdLst>
   <p:sldIdLst>
-    <p:sldId id="262" r:id="rId2"/>
-    <p:sldId id="261" r:id="rId3"/>
-    <p:sldId id="260" r:id="rId4"/>
-    <p:sldId id="259" r:id="rId5"/>
-    <p:sldId id="258" r:id="rId6"/>
-    <p:sldId id="256" r:id="rId7"/>
-    <p:sldId id="257" r:id="rId8"/>
+    <p:sldId id="261" r:id="rId15"/>
+    <p:sldId id="260" r:id="rId16"/>
+    <p:sldId id="259" r:id="rId17"/>
+    <p:sldId id="258" r:id="rId18"/>
+    <p:sldId id="256" r:id="rId19"/>
+    <p:sldId id="257" r:id="rId20"/>
   </p:sldIdLst>
   <p:sldSz cx="12192000" cy="6858000"/>
   <p:notesSz cx="6858000" cy="9144000"/>
@@ -3327,10 +3326,121 @@
           <a:chExt cx="0" cy="0"/>
         </a:xfrm>
       </p:grpSpPr>
+      <p:sp>
+        <p:nvSpPr>
+          <p:cNvPr id="4" name="TextBox 3">
+            <a:extLst>
+              <a:ext uri="{FF2B5EF4-FFF2-40B4-BE49-F238E27FC236}">
+                <a16:creationId xmlns:a16="http://schemas.microsoft.com/office/drawing/2014/main" id="{E51E32E6-FBB3-8DE5-F45F-AB34E2194445}"/>
+              </a:ext>
+            </a:extLst>
+          </p:cNvPr>
+          <p:cNvSpPr txBox="1"/>
+          <p:nvPr/>
+        </p:nvSpPr>
+        <p:spPr>
+          <a:xfrm>
+            <a:off x="609600" y="542925"/>
+            <a:ext cx="1479892" cy="369332"/>
+          </a:xfrm>
+          <a:prstGeom prst="rect">
+            <a:avLst/>
+          </a:prstGeom>
+          <a:noFill/>
+        </p:spPr>
+        <p:txBody>
+          <a:bodyPr wrap="none" rtlCol="0">
+            <a:spAutoFit/>
+          </a:bodyPr>
+          <a:lstStyle/>
+          <a:p>
+            <a:r>
+              <a:rPr lang="en-US" altLang="ko-KR" dirty="0"/>
+              <a:t>Main </a:t>
+            </a:r>
+            <a:r>
+              <a:rPr lang="ko-KR" altLang="en-US" dirty="0"/>
+              <a:t>페이지</a:t>
+            </a:r>
+          </a:p>
+        </p:txBody>
+      </p:sp>
+      <p:pic>
+        <p:nvPicPr>
+          <p:cNvPr id="6" name="그림 5">
+            <a:extLst>
+              <a:ext uri="{FF2B5EF4-FFF2-40B4-BE49-F238E27FC236}">
+                <a16:creationId xmlns:a16="http://schemas.microsoft.com/office/drawing/2014/main" id="{2548A119-533A-5C7B-6E1B-1457E15C0310}"/>
+              </a:ext>
+            </a:extLst>
+          </p:cNvPr>
+          <p:cNvPicPr>
+            <a:picLocks noChangeAspect="1"/>
+          </p:cNvPicPr>
+          <p:nvPr/>
+        </p:nvPicPr>
+        <p:blipFill>
+          <a:blip r:embed="rId2">
+            <a:extLst>
+              <a:ext uri="{28A0092B-C50C-407E-A947-70E740481C1C}">
+                <a14:useLocalDpi xmlns:a14="http://schemas.microsoft.com/office/drawing/2010/main" val="0"/>
+              </a:ext>
+            </a:extLst>
+          </a:blip>
+          <a:stretch>
+            <a:fillRect/>
+          </a:stretch>
+        </p:blipFill>
+        <p:spPr>
+          <a:xfrm>
+            <a:off x="0" y="3429000"/>
+            <a:ext cx="12192000" cy="2540000"/>
+          </a:xfrm>
+          <a:prstGeom prst="rect">
+            <a:avLst/>
+          </a:prstGeom>
+        </p:spPr>
+      </p:pic>
+      <p:pic>
+        <p:nvPicPr>
+          <p:cNvPr id="8" name="그림 7">
+            <a:extLst>
+              <a:ext uri="{FF2B5EF4-FFF2-40B4-BE49-F238E27FC236}">
+                <a16:creationId xmlns:a16="http://schemas.microsoft.com/office/drawing/2014/main" id="{15E6BD9A-C746-BA06-B882-4E6BE13F2503}"/>
+              </a:ext>
+            </a:extLst>
+          </p:cNvPr>
+          <p:cNvPicPr>
+            <a:picLocks noChangeAspect="1"/>
+          </p:cNvPicPr>
+          <p:nvPr/>
+        </p:nvPicPr>
+        <p:blipFill>
+          <a:blip r:embed="rId3">
+            <a:extLst>
+              <a:ext uri="{28A0092B-C50C-407E-A947-70E740481C1C}">
+                <a14:useLocalDpi xmlns:a14="http://schemas.microsoft.com/office/drawing/2010/main" val="0"/>
+              </a:ext>
+            </a:extLst>
+          </a:blip>
+          <a:stretch>
+            <a:fillRect/>
+          </a:stretch>
+        </p:blipFill>
+        <p:spPr>
+          <a:xfrm>
+            <a:off x="0" y="1491178"/>
+            <a:ext cx="12192000" cy="1270000"/>
+          </a:xfrm>
+          <a:prstGeom prst="rect">
+            <a:avLst/>
+          </a:prstGeom>
+        </p:spPr>
+      </p:pic>
     </p:spTree>
     <p:extLst>
       <p:ext uri="{BB962C8B-B14F-4D97-AF65-F5344CB8AC3E}">
-        <p14:creationId xmlns:p14="http://schemas.microsoft.com/office/powerpoint/2010/main" val="824877085"/>
+        <p14:creationId xmlns:p14="http://schemas.microsoft.com/office/powerpoint/2010/main" val="1983105398"/>
       </p:ext>
     </p:extLst>
   </p:cSld>
@@ -3357,51 +3467,12 @@
           <a:chExt cx="0" cy="0"/>
         </a:xfrm>
       </p:grpSpPr>
-      <p:sp>
-        <p:nvSpPr>
-          <p:cNvPr id="4" name="TextBox 3">
-            <a:extLst>
-              <a:ext uri="{FF2B5EF4-FFF2-40B4-BE49-F238E27FC236}">
-                <a16:creationId xmlns:a16="http://schemas.microsoft.com/office/drawing/2014/main" id="{E51E32E6-FBB3-8DE5-F45F-AB34E2194445}"/>
-              </a:ext>
-            </a:extLst>
-          </p:cNvPr>
-          <p:cNvSpPr txBox="1"/>
-          <p:nvPr/>
-        </p:nvSpPr>
-        <p:spPr>
-          <a:xfrm>
-            <a:off x="609600" y="542925"/>
-            <a:ext cx="1479892" cy="369332"/>
-          </a:xfrm>
-          <a:prstGeom prst="rect">
-            <a:avLst/>
-          </a:prstGeom>
-          <a:noFill/>
-        </p:spPr>
-        <p:txBody>
-          <a:bodyPr wrap="none" rtlCol="0">
-            <a:spAutoFit/>
-          </a:bodyPr>
-          <a:lstStyle/>
-          <a:p>
-            <a:r>
-              <a:rPr lang="en-US" altLang="ko-KR" dirty="0"/>
-              <a:t>Main </a:t>
-            </a:r>
-            <a:r>
-              <a:rPr lang="ko-KR" altLang="en-US" dirty="0"/>
-              <a:t>페이지</a:t>
-            </a:r>
-          </a:p>
-        </p:txBody>
-      </p:sp>
       <p:pic>
         <p:nvPicPr>
-          <p:cNvPr id="6" name="그림 5">
-            <a:extLst>
-              <a:ext uri="{FF2B5EF4-FFF2-40B4-BE49-F238E27FC236}">
-                <a16:creationId xmlns:a16="http://schemas.microsoft.com/office/drawing/2014/main" id="{2548A119-533A-5C7B-6E1B-1457E15C0310}"/>
+          <p:cNvPr id="5" name="그림 4">
+            <a:extLst>
+              <a:ext uri="{FF2B5EF4-FFF2-40B4-BE49-F238E27FC236}">
+                <a16:creationId xmlns:a16="http://schemas.microsoft.com/office/drawing/2014/main" id="{589D6F81-2A41-6ECA-C518-E0C6FACE6ECA}"/>
               </a:ext>
             </a:extLst>
           </p:cNvPr>
@@ -3424,8 +3495,8 @@
         </p:blipFill>
         <p:spPr>
           <a:xfrm>
-            <a:off x="0" y="3429000"/>
-            <a:ext cx="12192000" cy="2540000"/>
+            <a:off x="4381501" y="257197"/>
+            <a:ext cx="3648074" cy="2978364"/>
           </a:xfrm>
           <a:prstGeom prst="rect">
             <a:avLst/>
@@ -3434,10 +3505,10 @@
       </p:pic>
       <p:pic>
         <p:nvPicPr>
-          <p:cNvPr id="8" name="그림 7">
-            <a:extLst>
-              <a:ext uri="{FF2B5EF4-FFF2-40B4-BE49-F238E27FC236}">
-                <a16:creationId xmlns:a16="http://schemas.microsoft.com/office/drawing/2014/main" id="{15E6BD9A-C746-BA06-B882-4E6BE13F2503}"/>
+          <p:cNvPr id="7" name="그림 6">
+            <a:extLst>
+              <a:ext uri="{FF2B5EF4-FFF2-40B4-BE49-F238E27FC236}">
+                <a16:creationId xmlns:a16="http://schemas.microsoft.com/office/drawing/2014/main" id="{AFDD96F9-12DA-FCF1-9B96-B236D0B683F4}"/>
               </a:ext>
             </a:extLst>
           </p:cNvPr>
@@ -3460,18 +3531,195 @@
         </p:blipFill>
         <p:spPr>
           <a:xfrm>
-            <a:off x="0" y="1491178"/>
-            <a:ext cx="12192000" cy="1270000"/>
+            <a:off x="561974" y="3879636"/>
+            <a:ext cx="10429875" cy="2721167"/>
           </a:xfrm>
           <a:prstGeom prst="rect">
             <a:avLst/>
           </a:prstGeom>
         </p:spPr>
       </p:pic>
+      <p:sp>
+        <p:nvSpPr>
+          <p:cNvPr id="12" name="화살표: 아래쪽 11">
+            <a:extLst>
+              <a:ext uri="{FF2B5EF4-FFF2-40B4-BE49-F238E27FC236}">
+                <a16:creationId xmlns:a16="http://schemas.microsoft.com/office/drawing/2014/main" id="{B199949C-A465-F197-ECEE-8E12CEC0D5A4}"/>
+              </a:ext>
+            </a:extLst>
+          </p:cNvPr>
+          <p:cNvSpPr/>
+          <p:nvPr/>
+        </p:nvSpPr>
+        <p:spPr>
+          <a:xfrm rot="3593162">
+            <a:off x="4562473" y="2576665"/>
+            <a:ext cx="295275" cy="1514475"/>
+          </a:xfrm>
+          <a:prstGeom prst="downArrow">
+            <a:avLst/>
+          </a:prstGeom>
+        </p:spPr>
+        <p:style>
+          <a:lnRef idx="2">
+            <a:schemeClr val="accent1">
+              <a:shade val="15000"/>
+            </a:schemeClr>
+          </a:lnRef>
+          <a:fillRef idx="1">
+            <a:schemeClr val="accent1"/>
+          </a:fillRef>
+          <a:effectRef idx="0">
+            <a:schemeClr val="accent1"/>
+          </a:effectRef>
+          <a:fontRef idx="minor">
+            <a:schemeClr val="lt1"/>
+          </a:fontRef>
+        </p:style>
+        <p:txBody>
+          <a:bodyPr rtlCol="0" anchor="ctr"/>
+          <a:lstStyle/>
+          <a:p>
+            <a:pPr algn="ctr"/>
+            <a:endParaRPr lang="ko-KR" altLang="en-US"/>
+          </a:p>
+        </p:txBody>
+      </p:sp>
+      <p:sp>
+        <p:nvSpPr>
+          <p:cNvPr id="13" name="화살표: 아래쪽 12">
+            <a:extLst>
+              <a:ext uri="{FF2B5EF4-FFF2-40B4-BE49-F238E27FC236}">
+                <a16:creationId xmlns:a16="http://schemas.microsoft.com/office/drawing/2014/main" id="{4AC634AD-CBE9-02CB-851F-4B8A79195299}"/>
+              </a:ext>
+            </a:extLst>
+          </p:cNvPr>
+          <p:cNvSpPr/>
+          <p:nvPr/>
+        </p:nvSpPr>
+        <p:spPr>
+          <a:xfrm rot="16200000">
+            <a:off x="4062414" y="4935418"/>
+            <a:ext cx="638175" cy="609600"/>
+          </a:xfrm>
+          <a:prstGeom prst="downArrow">
+            <a:avLst/>
+          </a:prstGeom>
+        </p:spPr>
+        <p:style>
+          <a:lnRef idx="2">
+            <a:schemeClr val="accent1">
+              <a:shade val="15000"/>
+            </a:schemeClr>
+          </a:lnRef>
+          <a:fillRef idx="1">
+            <a:schemeClr val="accent1"/>
+          </a:fillRef>
+          <a:effectRef idx="0">
+            <a:schemeClr val="accent1"/>
+          </a:effectRef>
+          <a:fontRef idx="minor">
+            <a:schemeClr val="lt1"/>
+          </a:fontRef>
+        </p:style>
+        <p:txBody>
+          <a:bodyPr rtlCol="0" anchor="ctr"/>
+          <a:lstStyle/>
+          <a:p>
+            <a:pPr algn="ctr"/>
+            <a:endParaRPr lang="ko-KR" altLang="en-US"/>
+          </a:p>
+        </p:txBody>
+      </p:sp>
+      <p:sp>
+        <p:nvSpPr>
+          <p:cNvPr id="14" name="화살표: 아래쪽 13">
+            <a:extLst>
+              <a:ext uri="{FF2B5EF4-FFF2-40B4-BE49-F238E27FC236}">
+                <a16:creationId xmlns:a16="http://schemas.microsoft.com/office/drawing/2014/main" id="{2F4075C2-8E0D-1799-B78C-3B17F60DFFC8}"/>
+              </a:ext>
+            </a:extLst>
+          </p:cNvPr>
+          <p:cNvSpPr/>
+          <p:nvPr/>
+        </p:nvSpPr>
+        <p:spPr>
+          <a:xfrm rot="16200000">
+            <a:off x="7400925" y="4997330"/>
+            <a:ext cx="704850" cy="552450"/>
+          </a:xfrm>
+          <a:prstGeom prst="downArrow">
+            <a:avLst/>
+          </a:prstGeom>
+        </p:spPr>
+        <p:style>
+          <a:lnRef idx="2">
+            <a:schemeClr val="accent1">
+              <a:shade val="15000"/>
+            </a:schemeClr>
+          </a:lnRef>
+          <a:fillRef idx="1">
+            <a:schemeClr val="accent1"/>
+          </a:fillRef>
+          <a:effectRef idx="0">
+            <a:schemeClr val="accent1"/>
+          </a:effectRef>
+          <a:fontRef idx="minor">
+            <a:schemeClr val="lt1"/>
+          </a:fontRef>
+        </p:style>
+        <p:txBody>
+          <a:bodyPr rtlCol="0" anchor="ctr"/>
+          <a:lstStyle/>
+          <a:p>
+            <a:pPr algn="ctr"/>
+            <a:endParaRPr lang="ko-KR" altLang="en-US"/>
+          </a:p>
+        </p:txBody>
+      </p:sp>
+      <p:sp>
+        <p:nvSpPr>
+          <p:cNvPr id="15" name="TextBox 14">
+            <a:extLst>
+              <a:ext uri="{FF2B5EF4-FFF2-40B4-BE49-F238E27FC236}">
+                <a16:creationId xmlns:a16="http://schemas.microsoft.com/office/drawing/2014/main" id="{0E216326-341F-6794-AD32-AB3C77903B91}"/>
+              </a:ext>
+            </a:extLst>
+          </p:cNvPr>
+          <p:cNvSpPr txBox="1"/>
+          <p:nvPr/>
+        </p:nvSpPr>
+        <p:spPr>
+          <a:xfrm>
+            <a:off x="383382" y="819150"/>
+            <a:ext cx="3693319" cy="369332"/>
+          </a:xfrm>
+          <a:prstGeom prst="rect">
+            <a:avLst/>
+          </a:prstGeom>
+          <a:noFill/>
+        </p:spPr>
+        <p:txBody>
+          <a:bodyPr wrap="none" rtlCol="0">
+            <a:spAutoFit/>
+          </a:bodyPr>
+          <a:lstStyle/>
+          <a:p>
+            <a:r>
+              <a:rPr lang="en-US" altLang="ko-KR" dirty="0"/>
+              <a:t>Steam </a:t>
+            </a:r>
+            <a:r>
+              <a:rPr lang="ko-KR" altLang="en-US" dirty="0"/>
+              <a:t>사이트 로그인 및 회원가입</a:t>
+            </a:r>
+          </a:p>
+        </p:txBody>
+      </p:sp>
     </p:spTree>
     <p:extLst>
       <p:ext uri="{BB962C8B-B14F-4D97-AF65-F5344CB8AC3E}">
-        <p14:creationId xmlns:p14="http://schemas.microsoft.com/office/powerpoint/2010/main" val="1983105398"/>
+        <p14:creationId xmlns:p14="http://schemas.microsoft.com/office/powerpoint/2010/main" val="2256381207"/>
       </p:ext>
     </p:extLst>
   </p:cSld>
@@ -3503,7 +3751,7 @@
           <p:cNvPr id="5" name="그림 4">
             <a:extLst>
               <a:ext uri="{FF2B5EF4-FFF2-40B4-BE49-F238E27FC236}">
-                <a16:creationId xmlns:a16="http://schemas.microsoft.com/office/drawing/2014/main" id="{589D6F81-2A41-6ECA-C518-E0C6FACE6ECA}"/>
+                <a16:creationId xmlns:a16="http://schemas.microsoft.com/office/drawing/2014/main" id="{47811EE2-5726-61D3-23D1-3BE8C84BC683}"/>
               </a:ext>
             </a:extLst>
           </p:cNvPr>
@@ -3526,231 +3774,18 @@
         </p:blipFill>
         <p:spPr>
           <a:xfrm>
-            <a:off x="4381501" y="257197"/>
-            <a:ext cx="3648074" cy="2978364"/>
+            <a:off x="961181" y="0"/>
+            <a:ext cx="10269638" cy="6858000"/>
           </a:xfrm>
           <a:prstGeom prst="rect">
             <a:avLst/>
           </a:prstGeom>
         </p:spPr>
       </p:pic>
-      <p:pic>
-        <p:nvPicPr>
-          <p:cNvPr id="7" name="그림 6">
-            <a:extLst>
-              <a:ext uri="{FF2B5EF4-FFF2-40B4-BE49-F238E27FC236}">
-                <a16:creationId xmlns:a16="http://schemas.microsoft.com/office/drawing/2014/main" id="{AFDD96F9-12DA-FCF1-9B96-B236D0B683F4}"/>
-              </a:ext>
-            </a:extLst>
-          </p:cNvPr>
-          <p:cNvPicPr>
-            <a:picLocks noChangeAspect="1"/>
-          </p:cNvPicPr>
-          <p:nvPr/>
-        </p:nvPicPr>
-        <p:blipFill>
-          <a:blip r:embed="rId3">
-            <a:extLst>
-              <a:ext uri="{28A0092B-C50C-407E-A947-70E740481C1C}">
-                <a14:useLocalDpi xmlns:a14="http://schemas.microsoft.com/office/drawing/2010/main" val="0"/>
-              </a:ext>
-            </a:extLst>
-          </a:blip>
-          <a:stretch>
-            <a:fillRect/>
-          </a:stretch>
-        </p:blipFill>
-        <p:spPr>
-          <a:xfrm>
-            <a:off x="561974" y="3879636"/>
-            <a:ext cx="10429875" cy="2721167"/>
-          </a:xfrm>
-          <a:prstGeom prst="rect">
-            <a:avLst/>
-          </a:prstGeom>
-        </p:spPr>
-      </p:pic>
-      <p:sp>
-        <p:nvSpPr>
-          <p:cNvPr id="12" name="화살표: 아래쪽 11">
-            <a:extLst>
-              <a:ext uri="{FF2B5EF4-FFF2-40B4-BE49-F238E27FC236}">
-                <a16:creationId xmlns:a16="http://schemas.microsoft.com/office/drawing/2014/main" id="{B199949C-A465-F197-ECEE-8E12CEC0D5A4}"/>
-              </a:ext>
-            </a:extLst>
-          </p:cNvPr>
-          <p:cNvSpPr/>
-          <p:nvPr/>
-        </p:nvSpPr>
-        <p:spPr>
-          <a:xfrm rot="3593162">
-            <a:off x="4562473" y="2576665"/>
-            <a:ext cx="295275" cy="1514475"/>
-          </a:xfrm>
-          <a:prstGeom prst="downArrow">
-            <a:avLst/>
-          </a:prstGeom>
-        </p:spPr>
-        <p:style>
-          <a:lnRef idx="2">
-            <a:schemeClr val="accent1">
-              <a:shade val="15000"/>
-            </a:schemeClr>
-          </a:lnRef>
-          <a:fillRef idx="1">
-            <a:schemeClr val="accent1"/>
-          </a:fillRef>
-          <a:effectRef idx="0">
-            <a:schemeClr val="accent1"/>
-          </a:effectRef>
-          <a:fontRef idx="minor">
-            <a:schemeClr val="lt1"/>
-          </a:fontRef>
-        </p:style>
-        <p:txBody>
-          <a:bodyPr rtlCol="0" anchor="ctr"/>
-          <a:lstStyle/>
-          <a:p>
-            <a:pPr algn="ctr"/>
-            <a:endParaRPr lang="ko-KR" altLang="en-US"/>
-          </a:p>
-        </p:txBody>
-      </p:sp>
-      <p:sp>
-        <p:nvSpPr>
-          <p:cNvPr id="13" name="화살표: 아래쪽 12">
-            <a:extLst>
-              <a:ext uri="{FF2B5EF4-FFF2-40B4-BE49-F238E27FC236}">
-                <a16:creationId xmlns:a16="http://schemas.microsoft.com/office/drawing/2014/main" id="{4AC634AD-CBE9-02CB-851F-4B8A79195299}"/>
-              </a:ext>
-            </a:extLst>
-          </p:cNvPr>
-          <p:cNvSpPr/>
-          <p:nvPr/>
-        </p:nvSpPr>
-        <p:spPr>
-          <a:xfrm rot="16200000">
-            <a:off x="4062414" y="4935418"/>
-            <a:ext cx="638175" cy="609600"/>
-          </a:xfrm>
-          <a:prstGeom prst="downArrow">
-            <a:avLst/>
-          </a:prstGeom>
-        </p:spPr>
-        <p:style>
-          <a:lnRef idx="2">
-            <a:schemeClr val="accent1">
-              <a:shade val="15000"/>
-            </a:schemeClr>
-          </a:lnRef>
-          <a:fillRef idx="1">
-            <a:schemeClr val="accent1"/>
-          </a:fillRef>
-          <a:effectRef idx="0">
-            <a:schemeClr val="accent1"/>
-          </a:effectRef>
-          <a:fontRef idx="minor">
-            <a:schemeClr val="lt1"/>
-          </a:fontRef>
-        </p:style>
-        <p:txBody>
-          <a:bodyPr rtlCol="0" anchor="ctr"/>
-          <a:lstStyle/>
-          <a:p>
-            <a:pPr algn="ctr"/>
-            <a:endParaRPr lang="ko-KR" altLang="en-US"/>
-          </a:p>
-        </p:txBody>
-      </p:sp>
-      <p:sp>
-        <p:nvSpPr>
-          <p:cNvPr id="14" name="화살표: 아래쪽 13">
-            <a:extLst>
-              <a:ext uri="{FF2B5EF4-FFF2-40B4-BE49-F238E27FC236}">
-                <a16:creationId xmlns:a16="http://schemas.microsoft.com/office/drawing/2014/main" id="{2F4075C2-8E0D-1799-B78C-3B17F60DFFC8}"/>
-              </a:ext>
-            </a:extLst>
-          </p:cNvPr>
-          <p:cNvSpPr/>
-          <p:nvPr/>
-        </p:nvSpPr>
-        <p:spPr>
-          <a:xfrm rot="16200000">
-            <a:off x="7400925" y="4997330"/>
-            <a:ext cx="704850" cy="552450"/>
-          </a:xfrm>
-          <a:prstGeom prst="downArrow">
-            <a:avLst/>
-          </a:prstGeom>
-        </p:spPr>
-        <p:style>
-          <a:lnRef idx="2">
-            <a:schemeClr val="accent1">
-              <a:shade val="15000"/>
-            </a:schemeClr>
-          </a:lnRef>
-          <a:fillRef idx="1">
-            <a:schemeClr val="accent1"/>
-          </a:fillRef>
-          <a:effectRef idx="0">
-            <a:schemeClr val="accent1"/>
-          </a:effectRef>
-          <a:fontRef idx="minor">
-            <a:schemeClr val="lt1"/>
-          </a:fontRef>
-        </p:style>
-        <p:txBody>
-          <a:bodyPr rtlCol="0" anchor="ctr"/>
-          <a:lstStyle/>
-          <a:p>
-            <a:pPr algn="ctr"/>
-            <a:endParaRPr lang="ko-KR" altLang="en-US"/>
-          </a:p>
-        </p:txBody>
-      </p:sp>
-      <p:sp>
-        <p:nvSpPr>
-          <p:cNvPr id="15" name="TextBox 14">
-            <a:extLst>
-              <a:ext uri="{FF2B5EF4-FFF2-40B4-BE49-F238E27FC236}">
-                <a16:creationId xmlns:a16="http://schemas.microsoft.com/office/drawing/2014/main" id="{0E216326-341F-6794-AD32-AB3C77903B91}"/>
-              </a:ext>
-            </a:extLst>
-          </p:cNvPr>
-          <p:cNvSpPr txBox="1"/>
-          <p:nvPr/>
-        </p:nvSpPr>
-        <p:spPr>
-          <a:xfrm>
-            <a:off x="383382" y="819150"/>
-            <a:ext cx="3693319" cy="369332"/>
-          </a:xfrm>
-          <a:prstGeom prst="rect">
-            <a:avLst/>
-          </a:prstGeom>
-          <a:noFill/>
-        </p:spPr>
-        <p:txBody>
-          <a:bodyPr wrap="none" rtlCol="0">
-            <a:spAutoFit/>
-          </a:bodyPr>
-          <a:lstStyle/>
-          <a:p>
-            <a:r>
-              <a:rPr lang="en-US" altLang="ko-KR" dirty="0"/>
-              <a:t>Steam </a:t>
-            </a:r>
-            <a:r>
-              <a:rPr lang="ko-KR" altLang="en-US" dirty="0"/>
-              <a:t>사이트 로그인 및 회원가입</a:t>
-            </a:r>
-          </a:p>
-        </p:txBody>
-      </p:sp>
     </p:spTree>
     <p:extLst>
       <p:ext uri="{BB962C8B-B14F-4D97-AF65-F5344CB8AC3E}">
-        <p14:creationId xmlns:p14="http://schemas.microsoft.com/office/powerpoint/2010/main" val="2256381207"/>
+        <p14:creationId xmlns:p14="http://schemas.microsoft.com/office/powerpoint/2010/main" val="2375047111"/>
       </p:ext>
     </p:extLst>
   </p:cSld>
@@ -3782,7 +3817,7 @@
           <p:cNvPr id="5" name="그림 4">
             <a:extLst>
               <a:ext uri="{FF2B5EF4-FFF2-40B4-BE49-F238E27FC236}">
-                <a16:creationId xmlns:a16="http://schemas.microsoft.com/office/drawing/2014/main" id="{47811EE2-5726-61D3-23D1-3BE8C84BC683}"/>
+                <a16:creationId xmlns:a16="http://schemas.microsoft.com/office/drawing/2014/main" id="{2968AFD3-0CB8-7CD5-9962-8D5C6AA335C2}"/>
               </a:ext>
             </a:extLst>
           </p:cNvPr>
@@ -3813,10 +3848,46 @@
           </a:prstGeom>
         </p:spPr>
       </p:pic>
+      <p:pic>
+        <p:nvPicPr>
+          <p:cNvPr id="7" name="그림 6">
+            <a:extLst>
+              <a:ext uri="{FF2B5EF4-FFF2-40B4-BE49-F238E27FC236}">
+                <a16:creationId xmlns:a16="http://schemas.microsoft.com/office/drawing/2014/main" id="{6270E2F8-6386-9731-7150-023F249E5646}"/>
+              </a:ext>
+            </a:extLst>
+          </p:cNvPr>
+          <p:cNvPicPr>
+            <a:picLocks noChangeAspect="1"/>
+          </p:cNvPicPr>
+          <p:nvPr/>
+        </p:nvPicPr>
+        <p:blipFill>
+          <a:blip r:embed="rId3">
+            <a:extLst>
+              <a:ext uri="{28A0092B-C50C-407E-A947-70E740481C1C}">
+                <a14:useLocalDpi xmlns:a14="http://schemas.microsoft.com/office/drawing/2010/main" val="0"/>
+              </a:ext>
+            </a:extLst>
+          </a:blip>
+          <a:stretch>
+            <a:fillRect/>
+          </a:stretch>
+        </p:blipFill>
+        <p:spPr>
+          <a:xfrm>
+            <a:off x="868573" y="0"/>
+            <a:ext cx="10454853" cy="6858000"/>
+          </a:xfrm>
+          <a:prstGeom prst="rect">
+            <a:avLst/>
+          </a:prstGeom>
+        </p:spPr>
+      </p:pic>
     </p:spTree>
     <p:extLst>
       <p:ext uri="{BB962C8B-B14F-4D97-AF65-F5344CB8AC3E}">
-        <p14:creationId xmlns:p14="http://schemas.microsoft.com/office/powerpoint/2010/main" val="2375047111"/>
+        <p14:creationId xmlns:p14="http://schemas.microsoft.com/office/powerpoint/2010/main" val="614001514"/>
       </p:ext>
     </p:extLst>
   </p:cSld>
@@ -3845,108 +3916,6 @@
       </p:grpSpPr>
       <p:pic>
         <p:nvPicPr>
-          <p:cNvPr id="5" name="그림 4">
-            <a:extLst>
-              <a:ext uri="{FF2B5EF4-FFF2-40B4-BE49-F238E27FC236}">
-                <a16:creationId xmlns:a16="http://schemas.microsoft.com/office/drawing/2014/main" id="{2968AFD3-0CB8-7CD5-9962-8D5C6AA335C2}"/>
-              </a:ext>
-            </a:extLst>
-          </p:cNvPr>
-          <p:cNvPicPr>
-            <a:picLocks noChangeAspect="1"/>
-          </p:cNvPicPr>
-          <p:nvPr/>
-        </p:nvPicPr>
-        <p:blipFill>
-          <a:blip r:embed="rId2">
-            <a:extLst>
-              <a:ext uri="{28A0092B-C50C-407E-A947-70E740481C1C}">
-                <a14:useLocalDpi xmlns:a14="http://schemas.microsoft.com/office/drawing/2010/main" val="0"/>
-              </a:ext>
-            </a:extLst>
-          </a:blip>
-          <a:stretch>
-            <a:fillRect/>
-          </a:stretch>
-        </p:blipFill>
-        <p:spPr>
-          <a:xfrm>
-            <a:off x="961181" y="0"/>
-            <a:ext cx="10269638" cy="6858000"/>
-          </a:xfrm>
-          <a:prstGeom prst="rect">
-            <a:avLst/>
-          </a:prstGeom>
-        </p:spPr>
-      </p:pic>
-      <p:pic>
-        <p:nvPicPr>
-          <p:cNvPr id="7" name="그림 6">
-            <a:extLst>
-              <a:ext uri="{FF2B5EF4-FFF2-40B4-BE49-F238E27FC236}">
-                <a16:creationId xmlns:a16="http://schemas.microsoft.com/office/drawing/2014/main" id="{6270E2F8-6386-9731-7150-023F249E5646}"/>
-              </a:ext>
-            </a:extLst>
-          </p:cNvPr>
-          <p:cNvPicPr>
-            <a:picLocks noChangeAspect="1"/>
-          </p:cNvPicPr>
-          <p:nvPr/>
-        </p:nvPicPr>
-        <p:blipFill>
-          <a:blip r:embed="rId3">
-            <a:extLst>
-              <a:ext uri="{28A0092B-C50C-407E-A947-70E740481C1C}">
-                <a14:useLocalDpi xmlns:a14="http://schemas.microsoft.com/office/drawing/2010/main" val="0"/>
-              </a:ext>
-            </a:extLst>
-          </a:blip>
-          <a:stretch>
-            <a:fillRect/>
-          </a:stretch>
-        </p:blipFill>
-        <p:spPr>
-          <a:xfrm>
-            <a:off x="868573" y="0"/>
-            <a:ext cx="10454853" cy="6858000"/>
-          </a:xfrm>
-          <a:prstGeom prst="rect">
-            <a:avLst/>
-          </a:prstGeom>
-        </p:spPr>
-      </p:pic>
-    </p:spTree>
-    <p:extLst>
-      <p:ext uri="{BB962C8B-B14F-4D97-AF65-F5344CB8AC3E}">
-        <p14:creationId xmlns:p14="http://schemas.microsoft.com/office/powerpoint/2010/main" val="614001514"/>
-      </p:ext>
-    </p:extLst>
-  </p:cSld>
-  <p:clrMapOvr>
-    <a:masterClrMapping/>
-  </p:clrMapOvr>
-</p:sld>
-</file>
-
-<file path=ppt/slides/slide6.xml><?xml version="1.0" encoding="utf-8"?>
-<p:sld xmlns:a="http://schemas.openxmlformats.org/drawingml/2006/main" xmlns:r="http://schemas.openxmlformats.org/officeDocument/2006/relationships" xmlns:p="http://schemas.openxmlformats.org/presentationml/2006/main">
-  <p:cSld>
-    <p:spTree>
-      <p:nvGrpSpPr>
-        <p:cNvPr id="1" name=""/>
-        <p:cNvGrpSpPr/>
-        <p:nvPr/>
-      </p:nvGrpSpPr>
-      <p:grpSpPr>
-        <a:xfrm>
-          <a:off x="0" y="0"/>
-          <a:ext cx="0" cy="0"/>
-          <a:chOff x="0" y="0"/>
-          <a:chExt cx="0" cy="0"/>
-        </a:xfrm>
-      </p:grpSpPr>
-      <p:pic>
-        <p:nvPicPr>
           <p:cNvPr id="9" name="그림 8">
             <a:extLst>
               <a:ext uri="{FF2B5EF4-FFF2-40B4-BE49-F238E27FC236}">
@@ -4105,7 +4074,7 @@
 </p:sld>
 </file>
 
-<file path=ppt/slides/slide7.xml><?xml version="1.0" encoding="utf-8"?>
+<file path=ppt/slides/slide6.xml><?xml version="1.0" encoding="utf-8"?>
 <p:sld xmlns:a="http://schemas.openxmlformats.org/drawingml/2006/main" xmlns:r="http://schemas.openxmlformats.org/officeDocument/2006/relationships" xmlns:p="http://schemas.openxmlformats.org/presentationml/2006/main">
   <p:cSld>
     <p:spTree>
